--- a/docs/decks/web-modernize-presentation.pptx
+++ b/docs/decks/web-modernize-presentation.pptx
@@ -3454,7 +3454,7 @@
                 </a:solidFill>
                 <a:latin typeface="Segoe UI Semibold"/>
               </a:rPr>
-              <a:t>Balaji Harikrishnan   ·   Cognizant   ·   June 2026   ·   v0.11.0</a:t>
+              <a:t>Balaji Harikrishnan   ·   Cognizant   ·   June 2026   ·   v0.13.0</a:t>
             </a:r>
           </a:p>
         </p:txBody>
@@ -3639,7 +3639,7 @@
                 </a:solidFill>
                 <a:latin typeface="Segoe UI Semibold"/>
               </a:rPr>
-              <a:t>The 16 Skills  (Slash Commands)</a:t>
+              <a:t>The 17 Skills  (Slash Commands)</a:t>
             </a:r>
           </a:p>
         </p:txBody>
@@ -3753,7 +3753,7 @@
                 </a:solidFill>
                 <a:latin typeface="Calibri"/>
               </a:rPr>
-              <a:t>web-modernize v0.11.0   ·   Balaji Harikrishnan   ·   Cognizant   ·   June 2026</a:t>
+              <a:t>web-modernize v0.13.0   ·   Balaji Harikrishnan   ·   Cognizant   ·   June 2026</a:t>
             </a:r>
           </a:p>
         </p:txBody>
@@ -3803,7 +3803,7 @@
         </p:nvGraphicFramePr>
         <p:xfrm>
           <a:off x="365760" y="1188720"/>
-          <a:ext cx="11460174" cy="5129784"/>
+          <a:ext cx="11460174" cy="5431536"/>
         </p:xfrm>
         <a:graphic>
           <a:graphicData uri="http://schemas.openxmlformats.org/drawingml/2006/table">
@@ -4236,7 +4236,7 @@
                           </a:solidFill>
                           <a:latin typeface="Calibri"/>
                         </a:rPr>
-                        <a:t>Runs lint, type-check, unit tests, and a behavioural-parity check on a migrated unit before it is declared done.</a:t>
+                        <a:t>Runs lint, type-check, tests, a behavioural-parity + security check, and an advisory code-quality review before a unit is declared done.</a:t>
                       </a:r>
                     </a:p>
                   </a:txBody>
@@ -4284,7 +4284,7 @@
                           </a:solidFill>
                           <a:latin typeface="Calibri"/>
                         </a:rPr>
-                        <a:t>Compares a migrated unit's behaviour against the legacy original — validation, output shape, errors, UI states — and lets the team acknowledge intentional differences.</a:t>
+                        <a:t>Compares a migrated unit's behaviour against the legacy original — validation, output shape, errors, UI states, security — and lets the team acknowledge intentional differences.</a:t>
                       </a:r>
                     </a:p>
                   </a:txBody>
@@ -4309,7 +4309,7 @@
                           </a:solidFill>
                           <a:latin typeface="Consolas"/>
                         </a:rPr>
-                        <a:t>/retry</a:t>
+                        <a:t>/quality-check</a:t>
                       </a:r>
                     </a:p>
                   </a:txBody>
@@ -4332,7 +4332,7 @@
                           </a:solidFill>
                           <a:latin typeface="Calibri"/>
                         </a:rPr>
-                        <a:t>Re-attempts a failed unit, optionally with team-supplied corrective guidance.</a:t>
+                        <a:t>Advisory review of the migrated code's idiomaticity — flags legacy patterns carried into the new stack. Never blocks.</a:t>
                       </a:r>
                     </a:p>
                   </a:txBody>
@@ -4357,7 +4357,7 @@
                           </a:solidFill>
                           <a:latin typeface="Consolas"/>
                         </a:rPr>
-                        <a:t>/rollback</a:t>
+                        <a:t>/retry</a:t>
                       </a:r>
                     </a:p>
                   </a:txBody>
@@ -4380,7 +4380,7 @@
                           </a:solidFill>
                           <a:latin typeface="Calibri"/>
                         </a:rPr>
-                        <a:t>Reverts a single unit back to its original state in one git command.</a:t>
+                        <a:t>Re-attempts a failed unit, optionally with team-supplied corrective guidance.</a:t>
                       </a:r>
                     </a:p>
                   </a:txBody>
@@ -4405,7 +4405,7 @@
                           </a:solidFill>
                           <a:latin typeface="Consolas"/>
                         </a:rPr>
-                        <a:t>/sync</a:t>
+                        <a:t>/rollback</a:t>
                       </a:r>
                     </a:p>
                   </a:txBody>
@@ -4428,7 +4428,7 @@
                           </a:solidFill>
                           <a:latin typeface="Calibri"/>
                         </a:rPr>
-                        <a:t>Merges teammates' parallel progress into the local copy with deterministic rules.</a:t>
+                        <a:t>Reverts a single unit back to its original state in one git command.</a:t>
                       </a:r>
                     </a:p>
                   </a:txBody>
@@ -4453,7 +4453,7 @@
                           </a:solidFill>
                           <a:latin typeface="Consolas"/>
                         </a:rPr>
-                        <a:t>/report</a:t>
+                        <a:t>/sync</a:t>
                       </a:r>
                     </a:p>
                   </a:txBody>
@@ -4476,7 +4476,7 @@
                           </a:solidFill>
                           <a:latin typeface="Calibri"/>
                         </a:rPr>
-                        <a:t>Generates a stakeholder report — burndown, ETA, risk — in Markdown, JSON, or HTML.</a:t>
+                        <a:t>Merges teammates' parallel progress into the local copy with deterministic rules.</a:t>
                       </a:r>
                     </a:p>
                   </a:txBody>
@@ -4501,7 +4501,7 @@
                           </a:solidFill>
                           <a:latin typeface="Consolas"/>
                         </a:rPr>
-                        <a:t>/status</a:t>
+                        <a:t>/report</a:t>
                       </a:r>
                     </a:p>
                   </a:txBody>
@@ -4524,7 +4524,7 @@
                           </a:solidFill>
                           <a:latin typeface="Calibri"/>
                         </a:rPr>
-                        <a:t>Shows a real-time dashboard of every unit, owner, and blocker (read-only).</a:t>
+                        <a:t>Generates a stakeholder report — burndown, ETA, risk — in Markdown, JSON, or HTML.</a:t>
                       </a:r>
                     </a:p>
                   </a:txBody>
@@ -4549,7 +4549,7 @@
                           </a:solidFill>
                           <a:latin typeface="Consolas"/>
                         </a:rPr>
-                        <a:t>/unlock</a:t>
+                        <a:t>/status</a:t>
                       </a:r>
                     </a:p>
                   </a:txBody>
@@ -4572,7 +4572,7 @@
                           </a:solidFill>
                           <a:latin typeface="Calibri"/>
                         </a:rPr>
-                        <a:t>Force-clears a stuck advisory lock left behind by a crashed session.</a:t>
+                        <a:t>Shows a real-time dashboard of every unit, owner, and blocker (read-only).</a:t>
                       </a:r>
                     </a:p>
                   </a:txBody>
@@ -4597,7 +4597,7 @@
                           </a:solidFill>
                           <a:latin typeface="Consolas"/>
                         </a:rPr>
-                        <a:t>/abandon</a:t>
+                        <a:t>/unlock</a:t>
                       </a:r>
                     </a:p>
                   </a:txBody>
@@ -4620,13 +4620,61 @@
                           </a:solidFill>
                           <a:latin typeface="Calibri"/>
                         </a:rPr>
+                        <a:t>Force-clears a stuck advisory lock left behind by a crashed session.</a:t>
+                      </a:r>
+                    </a:p>
+                  </a:txBody>
+                  <a:tcPr anchor="ctr" marL="73152" marR="73152" marT="18288" marB="18288">
+                    <a:solidFill>
+                      <a:srgbClr val="EBF2FF"/>
+                    </a:solidFill>
+                  </a:tcPr>
+                </a:tc>
+              </a:tr>
+              <a:tr h="301752">
+                <a:tc>
+                  <a:txBody>
+                    <a:bodyPr/>
+                    <a:lstStyle/>
+                    <a:p>
+                      <a:pPr algn="l"/>
+                      <a:r>
+                        <a:rPr sz="1100" b="1" i="0">
+                          <a:solidFill>
+                            <a:srgbClr val="1A56DB"/>
+                          </a:solidFill>
+                          <a:latin typeface="Consolas"/>
+                        </a:rPr>
+                        <a:t>/abandon</a:t>
+                      </a:r>
+                    </a:p>
+                  </a:txBody>
+                  <a:tcPr anchor="ctr" marL="73152" marR="73152" marT="18288" marB="18288">
+                    <a:solidFill>
+                      <a:srgbClr val="FAFBFC"/>
+                    </a:solidFill>
+                  </a:tcPr>
+                </a:tc>
+                <a:tc>
+                  <a:txBody>
+                    <a:bodyPr/>
+                    <a:lstStyle/>
+                    <a:p>
+                      <a:pPr algn="l"/>
+                      <a:r>
+                        <a:rPr sz="1100" b="0" i="0">
+                          <a:solidFill>
+                            <a:srgbClr val="1F2937"/>
+                          </a:solidFill>
+                          <a:latin typeface="Calibri"/>
+                        </a:rPr>
                         <a:t>Formally drops a unit or resets the workspace — requires two-step confirmation.</a:t>
                       </a:r>
                     </a:p>
                   </a:txBody>
                   <a:tcPr anchor="ctr" marL="73152" marR="73152" marT="18288" marB="18288">
                     <a:solidFill>
-                      <a:srgbClr val="EBF2FF"/>
+                      <a:srgbClr val="FAFBFC"/>
                     </a:solidFill>
                   </a:tcPr>
                 </a:tc>
@@ -4929,7 +4977,7 @@
                 </a:solidFill>
                 <a:latin typeface="Calibri"/>
               </a:rPr>
-              <a:t>web-modernize v0.11.0   ·   Balaji Harikrishnan   ·   Cognizant   ·   June 2026</a:t>
+              <a:t>web-modernize v0.13.0   ·   Balaji Harikrishnan   ·   Cognizant   ·   June 2026</a:t>
             </a:r>
           </a:p>
         </p:txBody>
@@ -4999,7 +5047,7 @@
                 </a:solidFill>
                 <a:latin typeface="Segoe UI Semibold"/>
               </a:rPr>
-              <a:t>4 AI Agents   (specialised AIs that read your code, translate it, verify behaviour, and steer around known pitfalls)</a:t>
+              <a:t>5 AI Agents   (specialised AIs that read your code, translate it, verify behaviour &amp; quality, and steer around known pitfalls)</a:t>
             </a:r>
           </a:p>
         </p:txBody>
@@ -5014,7 +5062,7 @@
         </p:nvGraphicFramePr>
         <p:xfrm>
           <a:off x="365760" y="1417320"/>
-          <a:ext cx="11460174" cy="1371600"/>
+          <a:ext cx="11460174" cy="1426464"/>
         </p:xfrm>
         <a:graphic>
           <a:graphicData uri="http://schemas.openxmlformats.org/drawingml/2006/table">
@@ -5026,7 +5074,7 @@
                 <a:gridCol w="2521238"/>
                 <a:gridCol w="8938936"/>
               </a:tblGrid>
-              <a:tr h="274320">
+              <a:tr h="237744">
                 <a:tc>
                   <a:txBody>
                     <a:bodyPr/>
@@ -5074,7 +5122,7 @@
                   </a:tcPr>
                 </a:tc>
               </a:tr>
-              <a:tr h="274320">
+              <a:tr h="237744">
                 <a:tc>
                   <a:txBody>
                     <a:bodyPr/>
@@ -5122,7 +5170,7 @@
                   </a:tcPr>
                 </a:tc>
               </a:tr>
-              <a:tr h="274320">
+              <a:tr h="237744">
                 <a:tc>
                   <a:txBody>
                     <a:bodyPr/>
@@ -5170,7 +5218,7 @@
                   </a:tcPr>
                 </a:tc>
               </a:tr>
-              <a:tr h="274320">
+              <a:tr h="237744">
                 <a:tc>
                   <a:txBody>
                     <a:bodyPr/>
@@ -5207,7 +5255,7 @@
                           </a:solidFill>
                           <a:latin typeface="Calibri"/>
                         </a:rPr>
-                        <a:t>Read-only AI that compares the migrated unit against the legacy original and reports behavioural differences tests can't catch.</a:t>
+                        <a:t>Read-only AI that compares migrated vs legacy for behavioural AND security differences tests can't catch.</a:t>
                       </a:r>
                     </a:p>
                   </a:txBody>
@@ -5218,7 +5266,7 @@
                   </a:tcPr>
                 </a:tc>
               </a:tr>
-              <a:tr h="274320">
+              <a:tr h="237744">
                 <a:tc>
                   <a:txBody>
                     <a:bodyPr/>
@@ -5232,7 +5280,7 @@
                           </a:solidFill>
                           <a:latin typeface="Consolas"/>
                         </a:rPr>
-                        <a:t>permanent-gotchas</a:t>
+                        <a:t>migration-critic</a:t>
                       </a:r>
                     </a:p>
                   </a:txBody>
@@ -5255,13 +5303,61 @@
                           </a:solidFill>
                           <a:latin typeface="Calibri"/>
                         </a:rPr>
+                        <a:t>Read-only, advisory AI that reviews the migrated code's idiomaticity — flags legacy patterns leaking into the new stack.</a:t>
+                      </a:r>
+                    </a:p>
+                  </a:txBody>
+                  <a:tcPr anchor="ctr" marL="73152" marR="73152" marT="18288" marB="18288">
+                    <a:solidFill>
+                      <a:srgbClr val="EBF2FF"/>
+                    </a:solidFill>
+                  </a:tcPr>
+                </a:tc>
+              </a:tr>
+              <a:tr h="237744">
+                <a:tc>
+                  <a:txBody>
+                    <a:bodyPr/>
+                    <a:lstStyle/>
+                    <a:p>
+                      <a:pPr algn="l"/>
+                      <a:r>
+                        <a:rPr sz="1100" b="1" i="0">
+                          <a:solidFill>
+                            <a:srgbClr val="1A56DB"/>
+                          </a:solidFill>
+                          <a:latin typeface="Consolas"/>
+                        </a:rPr>
+                        <a:t>permanent-gotchas</a:t>
+                      </a:r>
+                    </a:p>
+                  </a:txBody>
+                  <a:tcPr anchor="ctr" marL="73152" marR="73152" marT="18288" marB="18288">
+                    <a:solidFill>
+                      <a:srgbClr val="FAFBFC"/>
+                    </a:solidFill>
+                  </a:tcPr>
+                </a:tc>
+                <a:tc>
+                  <a:txBody>
+                    <a:bodyPr/>
+                    <a:lstStyle/>
+                    <a:p>
+                      <a:pPr algn="l"/>
+                      <a:r>
+                        <a:rPr sz="1100" b="0" i="0">
+                          <a:solidFill>
+                            <a:srgbClr val="1F2937"/>
+                          </a:solidFill>
+                          <a:latin typeface="Calibri"/>
+                        </a:rPr>
                         <a:t>Curated read-only catalog of bugs the AI cannot reliably discover on its own — first-run crashes and silent failures.</a:t>
                       </a:r>
                     </a:p>
                   </a:txBody>
                   <a:tcPr anchor="ctr" marL="73152" marR="73152" marT="18288" marB="18288">
                     <a:solidFill>
-                      <a:srgbClr val="EBF2FF"/>
+                      <a:srgbClr val="FAFBFC"/>
                     </a:solidFill>
                   </a:tcPr>
                 </a:tc>
@@ -5505,7 +5601,7 @@
                 </a:solidFill>
                 <a:latin typeface="Segoe UI Semibold"/>
               </a:rPr>
-              <a:t>9 Templates  +  31 Framework Files</a:t>
+              <a:t>9 Templates  ·  31 Framework Files  ·  1 Workflow Script</a:t>
             </a:r>
           </a:p>
         </p:txBody>
@@ -5520,7 +5616,7 @@
         </p:nvGraphicFramePr>
         <p:xfrm>
           <a:off x="365760" y="4434840"/>
-          <a:ext cx="11460174" cy="2048256"/>
+          <a:ext cx="11460174" cy="2057400"/>
         </p:xfrm>
         <a:graphic>
           <a:graphicData uri="http://schemas.openxmlformats.org/drawingml/2006/table">
@@ -5532,7 +5628,7 @@
                 <a:gridCol w="3896459"/>
                 <a:gridCol w="7563715"/>
               </a:tblGrid>
-              <a:tr h="256032">
+              <a:tr h="228600">
                 <a:tc>
                   <a:txBody>
                     <a:bodyPr/>
@@ -5580,7 +5676,7 @@
                   </a:tcPr>
                 </a:tc>
               </a:tr>
-              <a:tr h="256032">
+              <a:tr h="228600">
                 <a:tc>
                   <a:txBody>
                     <a:bodyPr/>
@@ -5628,7 +5724,7 @@
                   </a:tcPr>
                 </a:tc>
               </a:tr>
-              <a:tr h="256032">
+              <a:tr h="228600">
                 <a:tc>
                   <a:txBody>
                     <a:bodyPr/>
@@ -5665,7 +5761,7 @@
                           </a:solidFill>
                           <a:latin typeface="Calibri"/>
                         </a:rPr>
-                        <a:t>Declarative question catalog driving /analyze's interactive setup interview (new in v0.10.0).</a:t>
+                        <a:t>Declarative question catalog driving /analyze's interactive setup interview.</a:t>
                       </a:r>
                     </a:p>
                   </a:txBody>
@@ -5676,7 +5772,7 @@
                   </a:tcPr>
                 </a:tc>
               </a:tr>
-              <a:tr h="256032">
+              <a:tr h="228600">
                 <a:tc>
                   <a:txBody>
                     <a:bodyPr/>
@@ -5713,7 +5809,7 @@
                           </a:solidFill>
                           <a:latin typeface="Calibri"/>
                         </a:rPr>
-                        <a:t>One file per supported framework — detection signals, scaffold recipe, test framework, auth notes (new in v0.10.0).</a:t>
+                        <a:t>One file per supported framework — detection signals, scaffold recipe, test framework, auth notes.</a:t>
                       </a:r>
                     </a:p>
                   </a:txBody>
@@ -5724,7 +5820,7 @@
                   </a:tcPr>
                 </a:tc>
               </a:tr>
-              <a:tr h="256032">
+              <a:tr h="228600">
                 <a:tc>
                   <a:txBody>
                     <a:bodyPr/>
@@ -5738,7 +5834,7 @@
                           </a:solidFill>
                           <a:latin typeface="Consolas"/>
                         </a:rPr>
-                        <a:t>state.schema.json  +  unit.schema.json</a:t>
+                        <a:t>workflows/analyze-discovery.js</a:t>
                       </a:r>
                     </a:p>
                   </a:txBody>
@@ -5761,7 +5857,7 @@
                           </a:solidFill>
                           <a:latin typeface="Calibri"/>
                         </a:rPr>
-                        <a:t>Schemas for the workflow ledger and per-unit state — one JSON file per unit, conflict-free in git.</a:t>
+                        <a:t>Workflow-tool orchestration script — exhaustive loop-until-dry entry-point discovery driving /analyze.</a:t>
                       </a:r>
                     </a:p>
                   </a:txBody>
@@ -5772,7 +5868,7 @@
                   </a:tcPr>
                 </a:tc>
               </a:tr>
-              <a:tr h="256032">
+              <a:tr h="228600">
                 <a:tc>
                   <a:txBody>
                     <a:bodyPr/>
@@ -5786,7 +5882,7 @@
                           </a:solidFill>
                           <a:latin typeface="Consolas"/>
                         </a:rPr>
-                        <a:t>plan.md  +  report.md  +  notes-template.md</a:t>
+                        <a:t>state.schema.json  +  unit.schema.json</a:t>
                       </a:r>
                     </a:p>
                   </a:txBody>
@@ -5809,7 +5905,7 @@
                           </a:solidFill>
                           <a:latin typeface="Calibri"/>
                         </a:rPr>
-                        <a:t>Templates for the auto-generated plan, stakeholder reports, and per-unit design notes.</a:t>
+                        <a:t>Schemas for the workflow ledger and per-unit state — one JSON file per unit, conflict-free in git.</a:t>
                       </a:r>
                     </a:p>
                   </a:txBody>
@@ -5820,7 +5916,7 @@
                   </a:tcPr>
                 </a:tc>
               </a:tr>
-              <a:tr h="256032">
+              <a:tr h="228600">
                 <a:tc>
                   <a:txBody>
                     <a:bodyPr/>
@@ -5834,7 +5930,7 @@
                           </a:solidFill>
                           <a:latin typeface="Consolas"/>
                         </a:rPr>
-                        <a:t>verify.config.json</a:t>
+                        <a:t>plan.md  +  report.md  +  notes-template.md</a:t>
                       </a:r>
                     </a:p>
                   </a:txBody>
@@ -5857,7 +5953,7 @@
                           </a:solidFill>
                           <a:latin typeface="Calibri"/>
                         </a:rPr>
-                        <a:t>Per-stack lint, type-check, and test commands used by /verify.</a:t>
+                        <a:t>Templates for the auto-generated plan, stakeholder reports, and per-unit design notes.</a:t>
                       </a:r>
                     </a:p>
                   </a:txBody>
@@ -5868,7 +5964,7 @@
                   </a:tcPr>
                 </a:tc>
               </a:tr>
-              <a:tr h="256032">
+              <a:tr h="228600">
                 <a:tc>
                   <a:txBody>
                     <a:bodyPr/>
@@ -5882,7 +5978,7 @@
                           </a:solidFill>
                           <a:latin typeface="Consolas"/>
                         </a:rPr>
-                        <a:t>permanent-gotchas/fastapi/pyproject.toml</a:t>
+                        <a:t>verify.config.json</a:t>
                       </a:r>
                     </a:p>
                   </a:txBody>
@@ -5905,13 +6001,61 @@
                           </a:solidFill>
                           <a:latin typeface="Calibri"/>
                         </a:rPr>
+                        <a:t>Per-stack lint, type-check, and test commands used by /verify.</a:t>
+                      </a:r>
+                    </a:p>
+                  </a:txBody>
+                  <a:tcPr anchor="ctr" marL="73152" marR="73152" marT="18288" marB="18288">
+                    <a:solidFill>
+                      <a:srgbClr val="FAFBFC"/>
+                    </a:solidFill>
+                  </a:tcPr>
+                </a:tc>
+              </a:tr>
+              <a:tr h="228600">
+                <a:tc>
+                  <a:txBody>
+                    <a:bodyPr/>
+                    <a:lstStyle/>
+                    <a:p>
+                      <a:pPr algn="l"/>
+                      <a:r>
+                        <a:rPr sz="1000" b="1" i="0">
+                          <a:solidFill>
+                            <a:srgbClr val="1A56DB"/>
+                          </a:solidFill>
+                          <a:latin typeface="Consolas"/>
+                        </a:rPr>
+                        <a:t>permanent-gotchas/fastapi/pyproject.toml</a:t>
+                      </a:r>
+                    </a:p>
+                  </a:txBody>
+                  <a:tcPr anchor="ctr" marL="73152" marR="73152" marT="18288" marB="18288">
+                    <a:solidFill>
+                      <a:srgbClr val="EBF2FF"/>
+                    </a:solidFill>
+                  </a:tcPr>
+                </a:tc>
+                <a:tc>
+                  <a:txBody>
+                    <a:bodyPr/>
+                    <a:lstStyle/>
+                    <a:p>
+                      <a:pPr algn="l"/>
+                      <a:r>
+                        <a:rPr sz="1000" b="0" i="0">
+                          <a:solidFill>
+                            <a:srgbClr val="1F2937"/>
+                          </a:solidFill>
+                          <a:latin typeface="Calibri"/>
+                        </a:rPr>
                         <a:t>Reference asset that bypasses a known FastAPI install gotcha automatically.</a:t>
                       </a:r>
                     </a:p>
                   </a:txBody>
                   <a:tcPr anchor="ctr" marL="73152" marR="73152" marT="18288" marB="18288">
                     <a:solidFill>
-                      <a:srgbClr val="FAFBFC"/>
+                      <a:srgbClr val="EBF2FF"/>
                     </a:solidFill>
                   </a:tcPr>
                 </a:tc>
@@ -6568,7 +6712,7 @@
                 </a:solidFill>
                 <a:latin typeface="Calibri"/>
               </a:rPr>
-              <a:t>web-modernize v0.11.0   ·   github.com/balaji-hari/web-mordernize</a:t>
+              <a:t>web-modernize v0.13.0   ·   github.com/balaji-hari/web-mordernize</a:t>
             </a:r>
           </a:p>
         </p:txBody>
@@ -6867,7 +7011,7 @@
                 </a:solidFill>
                 <a:latin typeface="Calibri"/>
               </a:rPr>
-              <a:t>web-modernize v0.11.0   ·   Balaji Harikrishnan   ·   Cognizant   ·   June 2026</a:t>
+              <a:t>web-modernize v0.13.0   ·   Balaji Harikrishnan   ·   Cognizant   ·   June 2026</a:t>
             </a:r>
           </a:p>
         </p:txBody>
@@ -7698,7 +7842,7 @@
                 </a:solidFill>
                 <a:latin typeface="Calibri"/>
               </a:rPr>
-              <a:t>16 skills exposed as slash commands  ·  4 AI agents (analyzer, migrator, parity-reviewer, gotchas catalog)  ·  2 automation hooks  ·  9 schema-validated templates copied into the team's repo.</a:t>
+              <a:t>17 skills exposed as slash commands  ·  5 AI agents (analyzer, migrator, parity-reviewer, migration-critic, gotchas catalog)  ·  2 automation hooks  ·  a workflows/ orchestration script  ·  9 schema-validated templates copied into the team's repo.</a:t>
             </a:r>
           </a:p>
         </p:txBody>
@@ -8396,7 +8540,7 @@
                 </a:solidFill>
                 <a:latin typeface="Calibri"/>
               </a:rPr>
-              <a:t>web-modernize v0.11.0   ·   Balaji Harikrishnan   ·   Cognizant   ·   June 2026</a:t>
+              <a:t>web-modernize v0.13.0   ·   Balaji Harikrishnan   ·   Cognizant   ·   June 2026</a:t>
             </a:r>
           </a:p>
         </p:txBody>
@@ -9769,7 +9913,7 @@
                 </a:solidFill>
                 <a:latin typeface="Calibri"/>
               </a:rPr>
-              <a:t>web-modernize v0.11.0   ·   Balaji Harikrishnan   ·   Cognizant   ·   June 2026</a:t>
+              <a:t>web-modernize v0.13.0   ·   Balaji Harikrishnan   ·   Cognizant   ·   June 2026</a:t>
             </a:r>
           </a:p>
         </p:txBody>
@@ -10642,7 +10786,7 @@
                 </a:solidFill>
                 <a:latin typeface="Calibri"/>
               </a:rPr>
-              <a:t>Identifies entry points and key dependencies.</a:t>
+              <a:t>Identifies entry points  —  exhaustive loop-until-dry discovery on large apps.</a:t>
             </a:r>
           </a:p>
         </p:txBody>
@@ -11522,7 +11666,7 @@
                 </a:solidFill>
                 <a:latin typeface="Calibri"/>
               </a:rPr>
-              <a:t>Generates plan.md  —  a full, reviewable migration plan.</a:t>
+              <a:t>Generates plan.md  —  a reviewable plan with a dependency graph.</a:t>
             </a:r>
           </a:p>
         </p:txBody>
@@ -12110,7 +12254,7 @@
                 </a:solidFill>
                 <a:latin typeface="Calibri"/>
               </a:rPr>
-              <a:t>web-modernize v0.11.0   ·   Balaji Harikrishnan   ·   Cognizant   ·   June 2026</a:t>
+              <a:t>web-modernize v0.13.0   ·   Balaji Harikrishnan   ·   Cognizant   ·   June 2026</a:t>
             </a:r>
           </a:p>
         </p:txBody>
@@ -12453,7 +12597,7 @@
                 </a:solidFill>
                 <a:latin typeface="Calibri"/>
               </a:rPr>
-              <a:t>Modern app skeleton.
+              <a:t>Skeleton + toolchain preflight.
 Legacy assets copied in.</a:t>
             </a:r>
           </a:p>
@@ -14221,7 +14365,7 @@
                 </a:solidFill>
                 <a:latin typeface="Calibri"/>
               </a:rPr>
-              <a:t>/verify enforces lint + type-check + tests + a behavioural-parity check before a unit is marked done.  Per-unit git files mean zero merge conflicts in parallel.</a:t>
+              <a:t>/verify enforces lint + type-check + tests + behavioural-parity + security checks (plus an advisory code-quality review) before a unit is marked done.  Per-unit git files mean zero merge conflicts.</a:t>
             </a:r>
           </a:p>
         </p:txBody>
@@ -14599,7 +14743,7 @@
                 </a:solidFill>
                 <a:latin typeface="Calibri"/>
               </a:rPr>
-              <a:t>web-modernize v0.11.0   ·   Balaji Harikrishnan   ·   Cognizant   ·   June 2026</a:t>
+              <a:t>web-modernize v0.13.0   ·   Balaji Harikrishnan   ·   Cognizant   ·   June 2026</a:t>
             </a:r>
           </a:p>
         </p:txBody>
@@ -17161,7 +17305,7 @@
                 </a:solidFill>
                 <a:latin typeface="Calibri"/>
               </a:rPr>
-              <a:t>web-modernize v0.11.0   ·   Balaji Harikrishnan   ·   Cognizant   ·   June 2026</a:t>
+              <a:t>web-modernize v0.13.0   ·   Balaji Harikrishnan   ·   Cognizant   ·   June 2026</a:t>
             </a:r>
           </a:p>
         </p:txBody>
@@ -17516,7 +17660,7 @@
                 </a:solidFill>
                 <a:latin typeface="Calibri"/>
               </a:rPr>
-              <a:t>/verify is a hard gate — lint, type-check, and tests must pass before a unit transitions from migrated to verified. A read-only parity-reviewer then compares the migrated unit against the legacy original (validation, output shape, errors, UI states); high-severity differences block the unit until the team acknowledges them via /parity-check. Failed units keep their diagnostic history, and /retry --with-prompt re-attempts with human guidance.</a:t>
+              <a:t>/verify is a hard gate — lint, type-check, and tests must pass before a unit transitions from migrated to verified. A read-only parity-reviewer then compares migrated vs legacy — validation, output shape, errors, UI states, and security (dropped authorization, injection, secret leakage); high-severity differences block until acknowledged via /parity-check. An advisory migration-critic flags non-idiomatic code, and discovered credentials are masked in every shared artifact. /retry --with-prompt re-attempts with human guidance.</a:t>
             </a:r>
           </a:p>
         </p:txBody>
@@ -18089,7 +18233,7 @@
                 </a:solidFill>
                 <a:latin typeface="Calibri"/>
               </a:rPr>
-              <a:t>web-modernize v0.11.0   ·   Balaji Harikrishnan   ·   Cognizant   ·   June 2026</a:t>
+              <a:t>web-modernize v0.13.0   ·   Balaji Harikrishnan   ·   Cognizant   ·   June 2026</a:t>
             </a:r>
           </a:p>
         </p:txBody>
@@ -18284,7 +18428,7 @@
                 </a:solidFill>
                 <a:latin typeface="Calibri"/>
               </a:rPr>
-              <a:t>Every skill's description now packs intent phrases + a lifecycle anchor. Claude's native skill matcher routes plain-English requests to the right command — developers stop memorising 15 slash commands.</a:t>
+              <a:t>Every skill's description now packs intent phrases + a lifecycle anchor. Claude's native skill matcher routes plain-English requests to the right command — developers stop memorising 17 slash commands.</a:t>
             </a:r>
           </a:p>
         </p:txBody>
@@ -21127,7 +21271,7 @@
                 </a:solidFill>
                 <a:latin typeface="Calibri"/>
               </a:rPr>
-              <a:t>web-modernize v0.11.0   ·   Balaji Harikrishnan   ·   Cognizant   ·   June 2026</a:t>
+              <a:t>web-modernize v0.13.0   ·   Balaji Harikrishnan   ·   Cognizant   ·   June 2026</a:t>
             </a:r>
           </a:p>
         </p:txBody>

--- a/docs/decks/web-modernize-presentation.pptx
+++ b/docs/decks/web-modernize-presentation.pptx
@@ -3454,7 +3454,7 @@
                 </a:solidFill>
                 <a:latin typeface="Segoe UI Semibold"/>
               </a:rPr>
-              <a:t>Balaji Harikrishnan   ·   Cognizant   ·   June 2026   ·   v0.13.0</a:t>
+              <a:t>Balaji Harikrishnan   ·   Cognizant   ·   June 2026   ·   v0.15.0</a:t>
             </a:r>
           </a:p>
         </p:txBody>
@@ -3639,7 +3639,7 @@
                 </a:solidFill>
                 <a:latin typeface="Segoe UI Semibold"/>
               </a:rPr>
-              <a:t>The 17 Skills  (Slash Commands)</a:t>
+              <a:t>The 18 Skills  (Slash Commands)</a:t>
             </a:r>
           </a:p>
         </p:txBody>
@@ -3753,7 +3753,7 @@
                 </a:solidFill>
                 <a:latin typeface="Calibri"/>
               </a:rPr>
-              <a:t>web-modernize v0.13.0   ·   Balaji Harikrishnan   ·   Cognizant   ·   June 2026</a:t>
+              <a:t>web-modernize v0.15.0   ·   Balaji Harikrishnan   ·   Cognizant   ·   June 2026</a:t>
             </a:r>
           </a:p>
         </p:txBody>
@@ -3802,8 +3802,8 @@
           <p:nvPr/>
         </p:nvGraphicFramePr>
         <p:xfrm>
-          <a:off x="365760" y="1188720"/>
-          <a:ext cx="11460174" cy="5431536"/>
+          <a:off x="365760" y="1152144"/>
+          <a:ext cx="11460174" cy="5298948"/>
         </p:xfrm>
         <a:graphic>
           <a:graphicData uri="http://schemas.openxmlformats.org/drawingml/2006/table">
@@ -3815,7 +3815,7 @@
                 <a:gridCol w="2062831"/>
                 <a:gridCol w="9397343"/>
               </a:tblGrid>
-              <a:tr h="301752">
+              <a:tr h="278892">
                 <a:tc>
                   <a:txBody>
                     <a:bodyPr/>
@@ -3863,7 +3863,7 @@
                   </a:tcPr>
                 </a:tc>
               </a:tr>
-              <a:tr h="301752">
+              <a:tr h="278892">
                 <a:tc>
                   <a:txBody>
                     <a:bodyPr/>
@@ -3871,7 +3871,7 @@
                     <a:p>
                       <a:pPr algn="l"/>
                       <a:r>
-                        <a:rPr sz="1100" b="1" i="0">
+                        <a:rPr sz="1000" b="1" i="0">
                           <a:solidFill>
                             <a:srgbClr val="1A56DB"/>
                           </a:solidFill>
@@ -3894,7 +3894,7 @@
                     <a:p>
                       <a:pPr algn="l"/>
                       <a:r>
-                        <a:rPr sz="1100" b="0" i="0">
+                        <a:rPr sz="1000" b="0" i="0">
                           <a:solidFill>
                             <a:srgbClr val="1F2937"/>
                           </a:solidFill>
@@ -3911,7 +3911,7 @@
                   </a:tcPr>
                 </a:tc>
               </a:tr>
-              <a:tr h="301752">
+              <a:tr h="278892">
                 <a:tc>
                   <a:txBody>
                     <a:bodyPr/>
@@ -3919,7 +3919,7 @@
                     <a:p>
                       <a:pPr algn="l"/>
                       <a:r>
-                        <a:rPr sz="1100" b="1" i="0">
+                        <a:rPr sz="1000" b="1" i="0">
                           <a:solidFill>
                             <a:srgbClr val="1A56DB"/>
                           </a:solidFill>
@@ -3942,7 +3942,7 @@
                     <a:p>
                       <a:pPr algn="l"/>
                       <a:r>
-                        <a:rPr sz="1100" b="0" i="0">
+                        <a:rPr sz="1000" b="0" i="0">
                           <a:solidFill>
                             <a:srgbClr val="1F2937"/>
                           </a:solidFill>
@@ -3959,7 +3959,7 @@
                   </a:tcPr>
                 </a:tc>
               </a:tr>
-              <a:tr h="301752">
+              <a:tr h="278892">
                 <a:tc>
                   <a:txBody>
                     <a:bodyPr/>
@@ -3967,7 +3967,7 @@
                     <a:p>
                       <a:pPr algn="l"/>
                       <a:r>
-                        <a:rPr sz="1100" b="1" i="0">
+                        <a:rPr sz="1000" b="1" i="0">
                           <a:solidFill>
                             <a:srgbClr val="1A56DB"/>
                           </a:solidFill>
@@ -3990,7 +3990,7 @@
                     <a:p>
                       <a:pPr algn="l"/>
                       <a:r>
-                        <a:rPr sz="1100" b="0" i="0">
+                        <a:rPr sz="1000" b="0" i="0">
                           <a:solidFill>
                             <a:srgbClr val="1F2937"/>
                           </a:solidFill>
@@ -4007,7 +4007,7 @@
                   </a:tcPr>
                 </a:tc>
               </a:tr>
-              <a:tr h="301752">
+              <a:tr h="278892">
                 <a:tc>
                   <a:txBody>
                     <a:bodyPr/>
@@ -4015,7 +4015,7 @@
                     <a:p>
                       <a:pPr algn="l"/>
                       <a:r>
-                        <a:rPr sz="1100" b="1" i="0">
+                        <a:rPr sz="1000" b="1" i="0">
                           <a:solidFill>
                             <a:srgbClr val="1A56DB"/>
                           </a:solidFill>
@@ -4038,7 +4038,7 @@
                     <a:p>
                       <a:pPr algn="l"/>
                       <a:r>
-                        <a:rPr sz="1100" b="0" i="0">
+                        <a:rPr sz="1000" b="0" i="0">
                           <a:solidFill>
                             <a:srgbClr val="1F2937"/>
                           </a:solidFill>
@@ -4055,7 +4055,7 @@
                   </a:tcPr>
                 </a:tc>
               </a:tr>
-              <a:tr h="301752">
+              <a:tr h="278892">
                 <a:tc>
                   <a:txBody>
                     <a:bodyPr/>
@@ -4063,13 +4063,13 @@
                     <a:p>
                       <a:pPr algn="l"/>
                       <a:r>
-                        <a:rPr sz="1100" b="1" i="0">
+                        <a:rPr sz="1000" b="1" i="0">
                           <a:solidFill>
                             <a:srgbClr val="1A56DB"/>
                           </a:solidFill>
                           <a:latin typeface="Consolas"/>
                         </a:rPr>
-                        <a:t>/auth</a:t>
+                        <a:t>/foundation</a:t>
                       </a:r>
                     </a:p>
                   </a:txBody>
@@ -4086,13 +4086,13 @@
                     <a:p>
                       <a:pPr algn="l"/>
                       <a:r>
-                        <a:rPr sz="1100" b="0" i="0">
+                        <a:rPr sz="1000" b="0" i="0">
                           <a:solidFill>
                             <a:srgbClr val="1F2937"/>
                           </a:solidFill>
                           <a:latin typeface="Calibri"/>
                         </a:rPr>
-                        <a:t>Migrates login and authentication first, because every feature depends on it.</a:t>
+                        <a:t>Establishes the foundational slice first — login/auth plus opted-in cross-cutting concerns (i18n, feature flags, error handling, telemetry, logging, data-access wiring) — via one consolidated design-approval gate, implemented in parallel.</a:t>
                       </a:r>
                     </a:p>
                   </a:txBody>
@@ -4103,7 +4103,7 @@
                   </a:tcPr>
                 </a:tc>
               </a:tr>
-              <a:tr h="301752">
+              <a:tr h="278892">
                 <a:tc>
                   <a:txBody>
                     <a:bodyPr/>
@@ -4111,7 +4111,7 @@
                     <a:p>
                       <a:pPr algn="l"/>
                       <a:r>
-                        <a:rPr sz="1100" b="1" i="0">
+                        <a:rPr sz="1000" b="1" i="0">
                           <a:solidFill>
                             <a:srgbClr val="1A56DB"/>
                           </a:solidFill>
@@ -4134,13 +4134,13 @@
                     <a:p>
                       <a:pPr algn="l"/>
                       <a:r>
-                        <a:rPr sz="1100" b="0" i="0">
+                        <a:rPr sz="1000" b="0" i="0">
                           <a:solidFill>
                             <a:srgbClr val="1F2937"/>
                           </a:solidFill>
                           <a:latin typeface="Calibri"/>
                         </a:rPr>
-                        <a:t>Picks the next available unit from the backlog and migrates it automatically.</a:t>
+                        <a:t>Picks the next available unit from the backlog and migrates it — presenting a plan for approval first (opt-out).</a:t>
                       </a:r>
                     </a:p>
                   </a:txBody>
@@ -4151,7 +4151,7 @@
                   </a:tcPr>
                 </a:tc>
               </a:tr>
-              <a:tr h="301752">
+              <a:tr h="278892">
                 <a:tc>
                   <a:txBody>
                     <a:bodyPr/>
@@ -4159,7 +4159,7 @@
                     <a:p>
                       <a:pPr algn="l"/>
                       <a:r>
-                        <a:rPr sz="1100" b="1" i="0">
+                        <a:rPr sz="1000" b="1" i="0">
                           <a:solidFill>
                             <a:srgbClr val="1A56DB"/>
                           </a:solidFill>
@@ -4182,7 +4182,7 @@
                     <a:p>
                       <a:pPr algn="l"/>
                       <a:r>
-                        <a:rPr sz="1100" b="0" i="0">
+                        <a:rPr sz="1000" b="0" i="0">
                           <a:solidFill>
                             <a:srgbClr val="1F2937"/>
                           </a:solidFill>
@@ -4199,7 +4199,7 @@
                   </a:tcPr>
                 </a:tc>
               </a:tr>
-              <a:tr h="301752">
+              <a:tr h="278892">
                 <a:tc>
                   <a:txBody>
                     <a:bodyPr/>
@@ -4207,7 +4207,7 @@
                     <a:p>
                       <a:pPr algn="l"/>
                       <a:r>
-                        <a:rPr sz="1100" b="1" i="0">
+                        <a:rPr sz="1000" b="1" i="0">
                           <a:solidFill>
                             <a:srgbClr val="1A56DB"/>
                           </a:solidFill>
@@ -4230,13 +4230,13 @@
                     <a:p>
                       <a:pPr algn="l"/>
                       <a:r>
-                        <a:rPr sz="1100" b="0" i="0">
+                        <a:rPr sz="1000" b="0" i="0">
                           <a:solidFill>
                             <a:srgbClr val="1F2937"/>
                           </a:solidFill>
                           <a:latin typeface="Calibri"/>
                         </a:rPr>
-                        <a:t>Runs lint, type-check, tests, a behavioural-parity + security check, and an advisory code-quality review before a unit is declared done.</a:t>
+                        <a:t>Runs lint, type-check, tests, a behavioural-parity + security gate, and advisory code-quality + static-performance review; an opt-in dynamic tier (API replay + Playwright E2E) adds runtime checks.</a:t>
                       </a:r>
                     </a:p>
                   </a:txBody>
@@ -4247,7 +4247,7 @@
                   </a:tcPr>
                 </a:tc>
               </a:tr>
-              <a:tr h="301752">
+              <a:tr h="278892">
                 <a:tc>
                   <a:txBody>
                     <a:bodyPr/>
@@ -4255,7 +4255,7 @@
                     <a:p>
                       <a:pPr algn="l"/>
                       <a:r>
-                        <a:rPr sz="1100" b="1" i="0">
+                        <a:rPr sz="1000" b="1" i="0">
                           <a:solidFill>
                             <a:srgbClr val="1A56DB"/>
                           </a:solidFill>
@@ -4278,7 +4278,7 @@
                     <a:p>
                       <a:pPr algn="l"/>
                       <a:r>
-                        <a:rPr sz="1100" b="0" i="0">
+                        <a:rPr sz="1000" b="0" i="0">
                           <a:solidFill>
                             <a:srgbClr val="1F2937"/>
                           </a:solidFill>
@@ -4295,7 +4295,7 @@
                   </a:tcPr>
                 </a:tc>
               </a:tr>
-              <a:tr h="301752">
+              <a:tr h="278892">
                 <a:tc>
                   <a:txBody>
                     <a:bodyPr/>
@@ -4303,7 +4303,7 @@
                     <a:p>
                       <a:pPr algn="l"/>
                       <a:r>
-                        <a:rPr sz="1100" b="1" i="0">
+                        <a:rPr sz="1000" b="1" i="0">
                           <a:solidFill>
                             <a:srgbClr val="1A56DB"/>
                           </a:solidFill>
@@ -4326,13 +4326,13 @@
                     <a:p>
                       <a:pPr algn="l"/>
                       <a:r>
-                        <a:rPr sz="1100" b="0" i="0">
+                        <a:rPr sz="1000" b="0" i="0">
                           <a:solidFill>
                             <a:srgbClr val="1F2937"/>
                           </a:solidFill>
                           <a:latin typeface="Calibri"/>
                         </a:rPr>
-                        <a:t>Advisory review of the migrated code's idiomaticity — flags legacy patterns carried into the new stack. Never blocks.</a:t>
+                        <a:t>Advisory review of the migrated code's idiomaticity and static performance — flags legacy patterns and N+1/bundle/blocking regressions. Never blocks.</a:t>
                       </a:r>
                     </a:p>
                   </a:txBody>
@@ -4343,7 +4343,7 @@
                   </a:tcPr>
                 </a:tc>
               </a:tr>
-              <a:tr h="301752">
+              <a:tr h="278892">
                 <a:tc>
                   <a:txBody>
                     <a:bodyPr/>
@@ -4351,13 +4351,13 @@
                     <a:p>
                       <a:pPr algn="l"/>
                       <a:r>
-                        <a:rPr sz="1100" b="1" i="0">
+                        <a:rPr sz="1000" b="1" i="0">
                           <a:solidFill>
                             <a:srgbClr val="1A56DB"/>
                           </a:solidFill>
                           <a:latin typeface="Consolas"/>
                         </a:rPr>
-                        <a:t>/retry</a:t>
+                        <a:t>/integrate</a:t>
                       </a:r>
                     </a:p>
                   </a:txBody>
@@ -4374,13 +4374,13 @@
                     <a:p>
                       <a:pPr algn="l"/>
                       <a:r>
-                        <a:rPr sz="1100" b="0" i="0">
+                        <a:rPr sz="1000" b="0" i="0">
                           <a:solidFill>
                             <a:srgbClr val="1F2937"/>
                           </a:solidFill>
                           <a:latin typeface="Calibri"/>
                         </a:rPr>
-                        <a:t>Re-attempts a failed unit, optionally with team-supplied corrective guidance.</a:t>
+                        <a:t>Assembles the migrated units into the composed app — central router + nav, whole-app smoke, orphaned-unit + cutover-coverage report, and the strangler traffic-split proxy. Runs any time; idempotent.</a:t>
                       </a:r>
                     </a:p>
                   </a:txBody>
@@ -4391,7 +4391,7 @@
                   </a:tcPr>
                 </a:tc>
               </a:tr>
-              <a:tr h="301752">
+              <a:tr h="278892">
                 <a:tc>
                   <a:txBody>
                     <a:bodyPr/>
@@ -4399,13 +4399,13 @@
                     <a:p>
                       <a:pPr algn="l"/>
                       <a:r>
-                        <a:rPr sz="1100" b="1" i="0">
+                        <a:rPr sz="1000" b="1" i="0">
                           <a:solidFill>
                             <a:srgbClr val="1A56DB"/>
                           </a:solidFill>
                           <a:latin typeface="Consolas"/>
                         </a:rPr>
-                        <a:t>/rollback</a:t>
+                        <a:t>/retry</a:t>
                       </a:r>
                     </a:p>
                   </a:txBody>
@@ -4422,13 +4422,13 @@
                     <a:p>
                       <a:pPr algn="l"/>
                       <a:r>
-                        <a:rPr sz="1100" b="0" i="0">
+                        <a:rPr sz="1000" b="0" i="0">
                           <a:solidFill>
                             <a:srgbClr val="1F2937"/>
                           </a:solidFill>
                           <a:latin typeface="Calibri"/>
                         </a:rPr>
-                        <a:t>Reverts a single unit back to its original state in one git command.</a:t>
+                        <a:t>Re-attempts a failed unit, optionally with team-supplied corrective guidance.</a:t>
                       </a:r>
                     </a:p>
                   </a:txBody>
@@ -4439,7 +4439,7 @@
                   </a:tcPr>
                 </a:tc>
               </a:tr>
-              <a:tr h="301752">
+              <a:tr h="278892">
                 <a:tc>
                   <a:txBody>
                     <a:bodyPr/>
@@ -4447,13 +4447,13 @@
                     <a:p>
                       <a:pPr algn="l"/>
                       <a:r>
-                        <a:rPr sz="1100" b="1" i="0">
+                        <a:rPr sz="1000" b="1" i="0">
                           <a:solidFill>
                             <a:srgbClr val="1A56DB"/>
                           </a:solidFill>
                           <a:latin typeface="Consolas"/>
                         </a:rPr>
-                        <a:t>/sync</a:t>
+                        <a:t>/rollback</a:t>
                       </a:r>
                     </a:p>
                   </a:txBody>
@@ -4470,13 +4470,13 @@
                     <a:p>
                       <a:pPr algn="l"/>
                       <a:r>
-                        <a:rPr sz="1100" b="0" i="0">
+                        <a:rPr sz="1000" b="0" i="0">
                           <a:solidFill>
                             <a:srgbClr val="1F2937"/>
                           </a:solidFill>
                           <a:latin typeface="Calibri"/>
                         </a:rPr>
-                        <a:t>Merges teammates' parallel progress into the local copy with deterministic rules.</a:t>
+                        <a:t>Reverts a single unit back to its original state in one git command — refusing by default when it owns shared files others depend on.</a:t>
                       </a:r>
                     </a:p>
                   </a:txBody>
@@ -4487,7 +4487,7 @@
                   </a:tcPr>
                 </a:tc>
               </a:tr>
-              <a:tr h="301752">
+              <a:tr h="278892">
                 <a:tc>
                   <a:txBody>
                     <a:bodyPr/>
@@ -4495,13 +4495,13 @@
                     <a:p>
                       <a:pPr algn="l"/>
                       <a:r>
-                        <a:rPr sz="1100" b="1" i="0">
+                        <a:rPr sz="1000" b="1" i="0">
                           <a:solidFill>
                             <a:srgbClr val="1A56DB"/>
                           </a:solidFill>
                           <a:latin typeface="Consolas"/>
                         </a:rPr>
-                        <a:t>/report</a:t>
+                        <a:t>/sync</a:t>
                       </a:r>
                     </a:p>
                   </a:txBody>
@@ -4518,13 +4518,13 @@
                     <a:p>
                       <a:pPr algn="l"/>
                       <a:r>
-                        <a:rPr sz="1100" b="0" i="0">
+                        <a:rPr sz="1000" b="0" i="0">
                           <a:solidFill>
                             <a:srgbClr val="1F2937"/>
                           </a:solidFill>
                           <a:latin typeface="Calibri"/>
                         </a:rPr>
-                        <a:t>Generates a stakeholder report — burndown, ETA, risk — in Markdown, JSON, or HTML.</a:t>
+                        <a:t>Merges teammates' parallel progress into the local copy with deterministic rules.</a:t>
                       </a:r>
                     </a:p>
                   </a:txBody>
@@ -4535,7 +4535,7 @@
                   </a:tcPr>
                 </a:tc>
               </a:tr>
-              <a:tr h="301752">
+              <a:tr h="278892">
                 <a:tc>
                   <a:txBody>
                     <a:bodyPr/>
@@ -4543,13 +4543,13 @@
                     <a:p>
                       <a:pPr algn="l"/>
                       <a:r>
-                        <a:rPr sz="1100" b="1" i="0">
+                        <a:rPr sz="1000" b="1" i="0">
                           <a:solidFill>
                             <a:srgbClr val="1A56DB"/>
                           </a:solidFill>
                           <a:latin typeface="Consolas"/>
                         </a:rPr>
-                        <a:t>/status</a:t>
+                        <a:t>/report</a:t>
                       </a:r>
                     </a:p>
                   </a:txBody>
@@ -4566,13 +4566,13 @@
                     <a:p>
                       <a:pPr algn="l"/>
                       <a:r>
-                        <a:rPr sz="1100" b="0" i="0">
+                        <a:rPr sz="1000" b="0" i="0">
                           <a:solidFill>
                             <a:srgbClr val="1F2937"/>
                           </a:solidFill>
                           <a:latin typeface="Calibri"/>
                         </a:rPr>
-                        <a:t>Shows a real-time dashboard of every unit, owner, and blocker (read-only).</a:t>
+                        <a:t>Generates a stakeholder report — burndown, ETA, risk — in Markdown, JSON, or HTML.</a:t>
                       </a:r>
                     </a:p>
                   </a:txBody>
@@ -4583,7 +4583,7 @@
                   </a:tcPr>
                 </a:tc>
               </a:tr>
-              <a:tr h="301752">
+              <a:tr h="278892">
                 <a:tc>
                   <a:txBody>
                     <a:bodyPr/>
@@ -4591,13 +4591,13 @@
                     <a:p>
                       <a:pPr algn="l"/>
                       <a:r>
-                        <a:rPr sz="1100" b="1" i="0">
+                        <a:rPr sz="1000" b="1" i="0">
                           <a:solidFill>
                             <a:srgbClr val="1A56DB"/>
                           </a:solidFill>
                           <a:latin typeface="Consolas"/>
                         </a:rPr>
-                        <a:t>/unlock</a:t>
+                        <a:t>/status</a:t>
                       </a:r>
                     </a:p>
                   </a:txBody>
@@ -4614,13 +4614,13 @@
                     <a:p>
                       <a:pPr algn="l"/>
                       <a:r>
-                        <a:rPr sz="1100" b="0" i="0">
+                        <a:rPr sz="1000" b="0" i="0">
                           <a:solidFill>
                             <a:srgbClr val="1F2937"/>
                           </a:solidFill>
                           <a:latin typeface="Calibri"/>
                         </a:rPr>
-                        <a:t>Force-clears a stuck advisory lock left behind by a crashed session.</a:t>
+                        <a:t>Shows a real-time dashboard of every unit, owner, and blocker (read-only).</a:t>
                       </a:r>
                     </a:p>
                   </a:txBody>
@@ -4631,7 +4631,7 @@
                   </a:tcPr>
                 </a:tc>
               </a:tr>
-              <a:tr h="301752">
+              <a:tr h="278892">
                 <a:tc>
                   <a:txBody>
                     <a:bodyPr/>
@@ -4639,13 +4639,13 @@
                     <a:p>
                       <a:pPr algn="l"/>
                       <a:r>
-                        <a:rPr sz="1100" b="1" i="0">
+                        <a:rPr sz="1000" b="1" i="0">
                           <a:solidFill>
                             <a:srgbClr val="1A56DB"/>
                           </a:solidFill>
                           <a:latin typeface="Consolas"/>
                         </a:rPr>
-                        <a:t>/abandon</a:t>
+                        <a:t>/unlock</a:t>
                       </a:r>
                     </a:p>
                   </a:txBody>
@@ -4662,7 +4662,55 @@
                     <a:p>
                       <a:pPr algn="l"/>
                       <a:r>
-                        <a:rPr sz="1100" b="0" i="0">
+                        <a:rPr sz="1000" b="0" i="0">
+                          <a:solidFill>
+                            <a:srgbClr val="1F2937"/>
+                          </a:solidFill>
+                          <a:latin typeface="Calibri"/>
+                        </a:rPr>
+                        <a:t>Force-clears a stuck advisory lock left behind by a crashed session.</a:t>
+                      </a:r>
+                    </a:p>
+                  </a:txBody>
+                  <a:tcPr anchor="ctr" marL="73152" marR="73152" marT="18288" marB="18288">
+                    <a:solidFill>
+                      <a:srgbClr val="FAFBFC"/>
+                    </a:solidFill>
+                  </a:tcPr>
+                </a:tc>
+              </a:tr>
+              <a:tr h="278892">
+                <a:tc>
+                  <a:txBody>
+                    <a:bodyPr/>
+                    <a:lstStyle/>
+                    <a:p>
+                      <a:pPr algn="l"/>
+                      <a:r>
+                        <a:rPr sz="1000" b="1" i="0">
+                          <a:solidFill>
+                            <a:srgbClr val="1A56DB"/>
+                          </a:solidFill>
+                          <a:latin typeface="Consolas"/>
+                        </a:rPr>
+                        <a:t>/abandon</a:t>
+                      </a:r>
+                    </a:p>
+                  </a:txBody>
+                  <a:tcPr anchor="ctr" marL="73152" marR="73152" marT="18288" marB="18288">
+                    <a:solidFill>
+                      <a:srgbClr val="EBF2FF"/>
+                    </a:solidFill>
+                  </a:tcPr>
+                </a:tc>
+                <a:tc>
+                  <a:txBody>
+                    <a:bodyPr/>
+                    <a:lstStyle/>
+                    <a:p>
+                      <a:pPr algn="l"/>
+                      <a:r>
+                        <a:rPr sz="1000" b="0" i="0">
                           <a:solidFill>
                             <a:srgbClr val="1F2937"/>
                           </a:solidFill>
@@ -4674,7 +4722,7 @@
                   </a:txBody>
                   <a:tcPr anchor="ctr" marL="73152" marR="73152" marT="18288" marB="18288">
                     <a:solidFill>
-                      <a:srgbClr val="FAFBFC"/>
+                      <a:srgbClr val="EBF2FF"/>
                     </a:solidFill>
                   </a:tcPr>
                 </a:tc>
@@ -4977,7 +5025,7 @@
                 </a:solidFill>
                 <a:latin typeface="Calibri"/>
               </a:rPr>
-              <a:t>web-modernize v0.13.0   ·   Balaji Harikrishnan   ·   Cognizant   ·   June 2026</a:t>
+              <a:t>web-modernize v0.15.0   ·   Balaji Harikrishnan   ·   Cognizant   ·   June 2026</a:t>
             </a:r>
           </a:p>
         </p:txBody>
@@ -5025,8 +5073,8 @@
         </p:nvSpPr>
         <p:spPr>
           <a:xfrm>
-            <a:off x="365760" y="1115568"/>
-            <a:ext cx="11430000" cy="292608"/>
+            <a:off x="365760" y="1097280"/>
+            <a:ext cx="11430000" cy="274320"/>
           </a:xfrm>
           <a:prstGeom prst="rect">
             <a:avLst/>
@@ -5041,13 +5089,13 @@
           <a:p>
             <a:pPr algn="l"/>
             <a:r>
-              <a:rPr sz="1500" b="0" i="0">
+              <a:rPr sz="1400" b="0" i="0">
                 <a:solidFill>
                   <a:srgbClr val="1A56DB"/>
                 </a:solidFill>
                 <a:latin typeface="Segoe UI Semibold"/>
               </a:rPr>
-              <a:t>5 AI Agents   (specialised AIs that read your code, translate it, verify behaviour &amp; quality, and steer around known pitfalls)</a:t>
+              <a:t>6 AI Agents   (specialised AIs that read your code, translate it, verify behaviour, quality &amp; performance, and steer around known pitfalls)</a:t>
             </a:r>
           </a:p>
         </p:txBody>
@@ -5061,8 +5109,8 @@
           <p:nvPr/>
         </p:nvGraphicFramePr>
         <p:xfrm>
-          <a:off x="365760" y="1417320"/>
-          <a:ext cx="11460174" cy="1426464"/>
+          <a:off x="365760" y="1371600"/>
+          <a:ext cx="11460174" cy="1376172"/>
         </p:xfrm>
         <a:graphic>
           <a:graphicData uri="http://schemas.openxmlformats.org/drawingml/2006/table">
@@ -5074,7 +5122,7 @@
                 <a:gridCol w="2521238"/>
                 <a:gridCol w="8938936"/>
               </a:tblGrid>
-              <a:tr h="237744">
+              <a:tr h="196596">
                 <a:tc>
                   <a:txBody>
                     <a:bodyPr/>
@@ -5122,7 +5170,7 @@
                   </a:tcPr>
                 </a:tc>
               </a:tr>
-              <a:tr h="237744">
+              <a:tr h="196596">
                 <a:tc>
                   <a:txBody>
                     <a:bodyPr/>
@@ -5130,7 +5178,7 @@
                     <a:p>
                       <a:pPr algn="l"/>
                       <a:r>
-                        <a:rPr sz="1100" b="1" i="0">
+                        <a:rPr sz="1000" b="1" i="0">
                           <a:solidFill>
                             <a:srgbClr val="1A56DB"/>
                           </a:solidFill>
@@ -5153,7 +5201,7 @@
                     <a:p>
                       <a:pPr algn="l"/>
                       <a:r>
-                        <a:rPr sz="1100" b="0" i="0">
+                        <a:rPr sz="1000" b="0" i="0">
                           <a:solidFill>
                             <a:srgbClr val="1F2937"/>
                           </a:solidFill>
@@ -5170,7 +5218,7 @@
                   </a:tcPr>
                 </a:tc>
               </a:tr>
-              <a:tr h="237744">
+              <a:tr h="196596">
                 <a:tc>
                   <a:txBody>
                     <a:bodyPr/>
@@ -5178,7 +5226,7 @@
                     <a:p>
                       <a:pPr algn="l"/>
                       <a:r>
-                        <a:rPr sz="1100" b="1" i="0">
+                        <a:rPr sz="1000" b="1" i="0">
                           <a:solidFill>
                             <a:srgbClr val="1A56DB"/>
                           </a:solidFill>
@@ -5201,7 +5249,7 @@
                     <a:p>
                       <a:pPr algn="l"/>
                       <a:r>
-                        <a:rPr sz="1100" b="0" i="0">
+                        <a:rPr sz="1000" b="0" i="0">
                           <a:solidFill>
                             <a:srgbClr val="1F2937"/>
                           </a:solidFill>
@@ -5218,7 +5266,7 @@
                   </a:tcPr>
                 </a:tc>
               </a:tr>
-              <a:tr h="237744">
+              <a:tr h="196596">
                 <a:tc>
                   <a:txBody>
                     <a:bodyPr/>
@@ -5226,13 +5274,13 @@
                     <a:p>
                       <a:pPr algn="l"/>
                       <a:r>
-                        <a:rPr sz="1100" b="1" i="0">
+                        <a:rPr sz="1000" b="1" i="0">
                           <a:solidFill>
                             <a:srgbClr val="1A56DB"/>
                           </a:solidFill>
                           <a:latin typeface="Consolas"/>
                         </a:rPr>
-                        <a:t>parity-reviewer</a:t>
+                        <a:t>cross-cutting-migrator</a:t>
                       </a:r>
                     </a:p>
                   </a:txBody>
@@ -5249,13 +5297,13 @@
                     <a:p>
                       <a:pPr algn="l"/>
                       <a:r>
-                        <a:rPr sz="1100" b="0" i="0">
+                        <a:rPr sz="1000" b="0" i="0">
                           <a:solidFill>
                             <a:srgbClr val="1F2937"/>
                           </a:solidFill>
                           <a:latin typeface="Calibri"/>
                         </a:rPr>
-                        <a:t>Read-only AI that compares migrated vs legacy for behavioural AND security differences tests can't catch.</a:t>
+                        <a:t>Establishes one cross-cutting concern (auth / i18n / flags / error-handling / telemetry / logging / data-wiring); fanned out in parallel by /foundation.</a:t>
                       </a:r>
                     </a:p>
                   </a:txBody>
@@ -5266,7 +5314,7 @@
                   </a:tcPr>
                 </a:tc>
               </a:tr>
-              <a:tr h="237744">
+              <a:tr h="196596">
                 <a:tc>
                   <a:txBody>
                     <a:bodyPr/>
@@ -5274,13 +5322,13 @@
                     <a:p>
                       <a:pPr algn="l"/>
                       <a:r>
-                        <a:rPr sz="1100" b="1" i="0">
+                        <a:rPr sz="1000" b="1" i="0">
                           <a:solidFill>
                             <a:srgbClr val="1A56DB"/>
                           </a:solidFill>
                           <a:latin typeface="Consolas"/>
                         </a:rPr>
-                        <a:t>migration-critic</a:t>
+                        <a:t>parity-reviewer</a:t>
                       </a:r>
                     </a:p>
                   </a:txBody>
@@ -5297,13 +5345,13 @@
                     <a:p>
                       <a:pPr algn="l"/>
                       <a:r>
-                        <a:rPr sz="1100" b="0" i="0">
+                        <a:rPr sz="1000" b="0" i="0">
                           <a:solidFill>
                             <a:srgbClr val="1F2937"/>
                           </a:solidFill>
                           <a:latin typeface="Calibri"/>
                         </a:rPr>
-                        <a:t>Read-only, advisory AI that reviews the migrated code's idiomaticity — flags legacy patterns leaking into the new stack.</a:t>
+                        <a:t>Read-only AI that compares migrated vs legacy for behavioural AND security differences tests can't catch.</a:t>
                       </a:r>
                     </a:p>
                   </a:txBody>
@@ -5314,7 +5362,7 @@
                   </a:tcPr>
                 </a:tc>
               </a:tr>
-              <a:tr h="237744">
+              <a:tr h="196596">
                 <a:tc>
                   <a:txBody>
                     <a:bodyPr/>
@@ -5322,13 +5370,13 @@
                     <a:p>
                       <a:pPr algn="l"/>
                       <a:r>
-                        <a:rPr sz="1100" b="1" i="0">
+                        <a:rPr sz="1000" b="1" i="0">
                           <a:solidFill>
                             <a:srgbClr val="1A56DB"/>
                           </a:solidFill>
                           <a:latin typeface="Consolas"/>
                         </a:rPr>
-                        <a:t>permanent-gotchas</a:t>
+                        <a:t>migration-critic</a:t>
                       </a:r>
                     </a:p>
                   </a:txBody>
@@ -5345,7 +5393,55 @@
                     <a:p>
                       <a:pPr algn="l"/>
                       <a:r>
-                        <a:rPr sz="1100" b="0" i="0">
+                        <a:rPr sz="1000" b="0" i="0">
+                          <a:solidFill>
+                            <a:srgbClr val="1F2937"/>
+                          </a:solidFill>
+                          <a:latin typeface="Calibri"/>
+                        </a:rPr>
+                        <a:t>Read-only, advisory AI reviewing the migrated code's idiomaticity AND static performance — flags legacy patterns and N+1/bundle/blocking regressions.</a:t>
+                      </a:r>
+                    </a:p>
+                  </a:txBody>
+                  <a:tcPr anchor="ctr" marL="73152" marR="73152" marT="18288" marB="18288">
+                    <a:solidFill>
+                      <a:srgbClr val="FAFBFC"/>
+                    </a:solidFill>
+                  </a:tcPr>
+                </a:tc>
+              </a:tr>
+              <a:tr h="196596">
+                <a:tc>
+                  <a:txBody>
+                    <a:bodyPr/>
+                    <a:lstStyle/>
+                    <a:p>
+                      <a:pPr algn="l"/>
+                      <a:r>
+                        <a:rPr sz="1000" b="1" i="0">
+                          <a:solidFill>
+                            <a:srgbClr val="1A56DB"/>
+                          </a:solidFill>
+                          <a:latin typeface="Consolas"/>
+                        </a:rPr>
+                        <a:t>permanent-gotchas</a:t>
+                      </a:r>
+                    </a:p>
+                  </a:txBody>
+                  <a:tcPr anchor="ctr" marL="73152" marR="73152" marT="18288" marB="18288">
+                    <a:solidFill>
+                      <a:srgbClr val="EBF2FF"/>
+                    </a:solidFill>
+                  </a:tcPr>
+                </a:tc>
+                <a:tc>
+                  <a:txBody>
+                    <a:bodyPr/>
+                    <a:lstStyle/>
+                    <a:p>
+                      <a:pPr algn="l"/>
+                      <a:r>
+                        <a:rPr sz="1000" b="0" i="0">
                           <a:solidFill>
                             <a:srgbClr val="1F2937"/>
                           </a:solidFill>
@@ -5357,7 +5453,7 @@
                   </a:txBody>
                   <a:tcPr anchor="ctr" marL="73152" marR="73152" marT="18288" marB="18288">
                     <a:solidFill>
-                      <a:srgbClr val="FAFBFC"/>
+                      <a:srgbClr val="EBF2FF"/>
                     </a:solidFill>
                   </a:tcPr>
                 </a:tc>
@@ -5579,8 +5675,8 @@
         </p:nvSpPr>
         <p:spPr>
           <a:xfrm>
-            <a:off x="365760" y="4133087"/>
-            <a:ext cx="11430000" cy="292608"/>
+            <a:off x="365760" y="4114800"/>
+            <a:ext cx="11430000" cy="274320"/>
           </a:xfrm>
           <a:prstGeom prst="rect">
             <a:avLst/>
@@ -5595,13 +5691,13 @@
           <a:p>
             <a:pPr algn="l"/>
             <a:r>
-              <a:rPr sz="1500" b="0" i="0">
+              <a:rPr sz="1400" b="0" i="0">
                 <a:solidFill>
                   <a:srgbClr val="1A56DB"/>
                 </a:solidFill>
                 <a:latin typeface="Segoe UI Semibold"/>
               </a:rPr>
-              <a:t>9 Templates  ·  31 Framework Files  ·  1 Workflow Script</a:t>
+              <a:t>9 Templates  ·  31 Framework Files  ·  2 Workflow Scripts</a:t>
             </a:r>
           </a:p>
         </p:txBody>
@@ -5615,8 +5711,8 @@
           <p:nvPr/>
         </p:nvGraphicFramePr>
         <p:xfrm>
-          <a:off x="365760" y="4434840"/>
-          <a:ext cx="11460174" cy="2057400"/>
+          <a:off x="365760" y="4407408"/>
+          <a:ext cx="11460174" cy="2148840"/>
         </p:xfrm>
         <a:graphic>
           <a:graphicData uri="http://schemas.openxmlformats.org/drawingml/2006/table">
@@ -5628,7 +5724,7 @@
                 <a:gridCol w="3896459"/>
                 <a:gridCol w="7563715"/>
               </a:tblGrid>
-              <a:tr h="228600">
+              <a:tr h="214884">
                 <a:tc>
                   <a:txBody>
                     <a:bodyPr/>
@@ -5676,7 +5772,7 @@
                   </a:tcPr>
                 </a:tc>
               </a:tr>
-              <a:tr h="228600">
+              <a:tr h="214884">
                 <a:tc>
                   <a:txBody>
                     <a:bodyPr/>
@@ -5684,7 +5780,7 @@
                     <a:p>
                       <a:pPr algn="l"/>
                       <a:r>
-                        <a:rPr sz="1000" b="1" i="0">
+                        <a:rPr sz="900" b="1" i="0">
                           <a:solidFill>
                             <a:srgbClr val="1A56DB"/>
                           </a:solidFill>
@@ -5707,13 +5803,13 @@
                     <a:p>
                       <a:pPr algn="l"/>
                       <a:r>
-                        <a:rPr sz="1000" b="0" i="0">
+                        <a:rPr sz="900" b="0" i="0">
                           <a:solidFill>
                             <a:srgbClr val="1F2937"/>
                           </a:solidFill>
                           <a:latin typeface="Calibri"/>
                         </a:rPr>
-                        <a:t>The team-editable configuration: target stack, strategy, auth, acceptance criteria.</a:t>
+                        <a:t>The team-editable configuration: target stack, strategy, auth, cross-cutting concerns, acceptance criteria.</a:t>
                       </a:r>
                     </a:p>
                   </a:txBody>
@@ -5724,7 +5820,7 @@
                   </a:tcPr>
                 </a:tc>
               </a:tr>
-              <a:tr h="228600">
+              <a:tr h="214884">
                 <a:tc>
                   <a:txBody>
                     <a:bodyPr/>
@@ -5732,7 +5828,7 @@
                     <a:p>
                       <a:pPr algn="l"/>
                       <a:r>
-                        <a:rPr sz="1000" b="1" i="0">
+                        <a:rPr sz="900" b="1" i="0">
                           <a:solidFill>
                             <a:srgbClr val="1A56DB"/>
                           </a:solidFill>
@@ -5755,7 +5851,7 @@
                     <a:p>
                       <a:pPr algn="l"/>
                       <a:r>
-                        <a:rPr sz="1000" b="0" i="0">
+                        <a:rPr sz="900" b="0" i="0">
                           <a:solidFill>
                             <a:srgbClr val="1F2937"/>
                           </a:solidFill>
@@ -5772,7 +5868,7 @@
                   </a:tcPr>
                 </a:tc>
               </a:tr>
-              <a:tr h="228600">
+              <a:tr h="214884">
                 <a:tc>
                   <a:txBody>
                     <a:bodyPr/>
@@ -5780,7 +5876,7 @@
                     <a:p>
                       <a:pPr algn="l"/>
                       <a:r>
-                        <a:rPr sz="1000" b="1" i="0">
+                        <a:rPr sz="900" b="1" i="0">
                           <a:solidFill>
                             <a:srgbClr val="1A56DB"/>
                           </a:solidFill>
@@ -5803,13 +5899,13 @@
                     <a:p>
                       <a:pPr algn="l"/>
                       <a:r>
-                        <a:rPr sz="1000" b="0" i="0">
+                        <a:rPr sz="900" b="0" i="0">
                           <a:solidFill>
                             <a:srgbClr val="1F2937"/>
                           </a:solidFill>
                           <a:latin typeface="Calibri"/>
                         </a:rPr>
-                        <a:t>One file per supported framework — detection signals, scaffold recipe, test framework, auth notes.</a:t>
+                        <a:t>One file per supported framework — detection signals, scaffold/integration recipes, test framework, auth notes.</a:t>
                       </a:r>
                     </a:p>
                   </a:txBody>
@@ -5820,7 +5916,7 @@
                   </a:tcPr>
                 </a:tc>
               </a:tr>
-              <a:tr h="228600">
+              <a:tr h="214884">
                 <a:tc>
                   <a:txBody>
                     <a:bodyPr/>
@@ -5828,7 +5924,7 @@
                     <a:p>
                       <a:pPr algn="l"/>
                       <a:r>
-                        <a:rPr sz="1000" b="1" i="0">
+                        <a:rPr sz="900" b="1" i="0">
                           <a:solidFill>
                             <a:srgbClr val="1A56DB"/>
                           </a:solidFill>
@@ -5851,13 +5947,13 @@
                     <a:p>
                       <a:pPr algn="l"/>
                       <a:r>
-                        <a:rPr sz="1000" b="0" i="0">
+                        <a:rPr sz="900" b="0" i="0">
                           <a:solidFill>
                             <a:srgbClr val="1F2937"/>
                           </a:solidFill>
                           <a:latin typeface="Calibri"/>
                         </a:rPr>
-                        <a:t>Workflow-tool orchestration script — exhaustive loop-until-dry entry-point discovery driving /analyze.</a:t>
+                        <a:t>Workflow-tool script — exhaustive loop-until-dry entry-point discovery driving /analyze.</a:t>
                       </a:r>
                     </a:p>
                   </a:txBody>
@@ -5868,7 +5964,7 @@
                   </a:tcPr>
                 </a:tc>
               </a:tr>
-              <a:tr h="228600">
+              <a:tr h="214884">
                 <a:tc>
                   <a:txBody>
                     <a:bodyPr/>
@@ -5876,13 +5972,13 @@
                     <a:p>
                       <a:pPr algn="l"/>
                       <a:r>
-                        <a:rPr sz="1000" b="1" i="0">
+                        <a:rPr sz="900" b="1" i="0">
                           <a:solidFill>
                             <a:srgbClr val="1A56DB"/>
                           </a:solidFill>
                           <a:latin typeface="Consolas"/>
                         </a:rPr>
-                        <a:t>state.schema.json  +  unit.schema.json</a:t>
+                        <a:t>workflows/foundation-establish.js</a:t>
                       </a:r>
                     </a:p>
                   </a:txBody>
@@ -5899,13 +5995,13 @@
                     <a:p>
                       <a:pPr algn="l"/>
                       <a:r>
-                        <a:rPr sz="1000" b="0" i="0">
+                        <a:rPr sz="900" b="0" i="0">
                           <a:solidFill>
                             <a:srgbClr val="1F2937"/>
                           </a:solidFill>
                           <a:latin typeface="Calibri"/>
                         </a:rPr>
-                        <a:t>Schemas for the workflow ledger and per-unit state — one JSON file per unit, conflict-free in git.</a:t>
+                        <a:t>Workflow-tool script — fans out cross-cutting-migrator per concern, in parallel, for /foundation.</a:t>
                       </a:r>
                     </a:p>
                   </a:txBody>
@@ -5916,7 +6012,7 @@
                   </a:tcPr>
                 </a:tc>
               </a:tr>
-              <a:tr h="228600">
+              <a:tr h="214884">
                 <a:tc>
                   <a:txBody>
                     <a:bodyPr/>
@@ -5924,13 +6020,13 @@
                     <a:p>
                       <a:pPr algn="l"/>
                       <a:r>
-                        <a:rPr sz="1000" b="1" i="0">
+                        <a:rPr sz="900" b="1" i="0">
                           <a:solidFill>
                             <a:srgbClr val="1A56DB"/>
                           </a:solidFill>
                           <a:latin typeface="Consolas"/>
                         </a:rPr>
-                        <a:t>plan.md  +  report.md  +  notes-template.md</a:t>
+                        <a:t>state.schema.json  +  unit.schema.json</a:t>
                       </a:r>
                     </a:p>
                   </a:txBody>
@@ -5947,13 +6043,13 @@
                     <a:p>
                       <a:pPr algn="l"/>
                       <a:r>
-                        <a:rPr sz="1000" b="0" i="0">
+                        <a:rPr sz="900" b="0" i="0">
                           <a:solidFill>
                             <a:srgbClr val="1F2937"/>
                           </a:solidFill>
                           <a:latin typeface="Calibri"/>
                         </a:rPr>
-                        <a:t>Templates for the auto-generated plan, stakeholder reports, and per-unit design notes.</a:t>
+                        <a:t>Schemas for the workflow ledger and per-unit state — one JSON file per unit, conflict-free in git.</a:t>
                       </a:r>
                     </a:p>
                   </a:txBody>
@@ -5964,7 +6060,7 @@
                   </a:tcPr>
                 </a:tc>
               </a:tr>
-              <a:tr h="228600">
+              <a:tr h="214884">
                 <a:tc>
                   <a:txBody>
                     <a:bodyPr/>
@@ -5972,13 +6068,13 @@
                     <a:p>
                       <a:pPr algn="l"/>
                       <a:r>
-                        <a:rPr sz="1000" b="1" i="0">
+                        <a:rPr sz="900" b="1" i="0">
                           <a:solidFill>
                             <a:srgbClr val="1A56DB"/>
                           </a:solidFill>
                           <a:latin typeface="Consolas"/>
                         </a:rPr>
-                        <a:t>verify.config.json</a:t>
+                        <a:t>plan.md  +  report.md  +  notes-template.md</a:t>
                       </a:r>
                     </a:p>
                   </a:txBody>
@@ -5995,13 +6091,13 @@
                     <a:p>
                       <a:pPr algn="l"/>
                       <a:r>
-                        <a:rPr sz="1000" b="0" i="0">
+                        <a:rPr sz="900" b="0" i="0">
                           <a:solidFill>
                             <a:srgbClr val="1F2937"/>
                           </a:solidFill>
                           <a:latin typeface="Calibri"/>
                         </a:rPr>
-                        <a:t>Per-stack lint, type-check, and test commands used by /verify.</a:t>
+                        <a:t>Templates for the auto-generated plan, stakeholder reports, and per-unit design notes.</a:t>
                       </a:r>
                     </a:p>
                   </a:txBody>
@@ -6012,7 +6108,7 @@
                   </a:tcPr>
                 </a:tc>
               </a:tr>
-              <a:tr h="228600">
+              <a:tr h="214884">
                 <a:tc>
                   <a:txBody>
                     <a:bodyPr/>
@@ -6020,13 +6116,13 @@
                     <a:p>
                       <a:pPr algn="l"/>
                       <a:r>
-                        <a:rPr sz="1000" b="1" i="0">
+                        <a:rPr sz="900" b="1" i="0">
                           <a:solidFill>
                             <a:srgbClr val="1A56DB"/>
                           </a:solidFill>
                           <a:latin typeface="Consolas"/>
                         </a:rPr>
-                        <a:t>permanent-gotchas/fastapi/pyproject.toml</a:t>
+                        <a:t>verify.config.json</a:t>
                       </a:r>
                     </a:p>
                   </a:txBody>
@@ -6043,7 +6139,55 @@
                     <a:p>
                       <a:pPr algn="l"/>
                       <a:r>
-                        <a:rPr sz="1000" b="0" i="0">
+                        <a:rPr sz="900" b="0" i="0">
+                          <a:solidFill>
+                            <a:srgbClr val="1F2937"/>
+                          </a:solidFill>
+                          <a:latin typeface="Calibri"/>
+                        </a:rPr>
+                        <a:t>Per-stack lint, type-check, test, and dynamic (E2E + API-replay) commands used by /verify.</a:t>
+                      </a:r>
+                    </a:p>
+                  </a:txBody>
+                  <a:tcPr anchor="ctr" marL="73152" marR="73152" marT="18288" marB="18288">
+                    <a:solidFill>
+                      <a:srgbClr val="EBF2FF"/>
+                    </a:solidFill>
+                  </a:tcPr>
+                </a:tc>
+              </a:tr>
+              <a:tr h="214884">
+                <a:tc>
+                  <a:txBody>
+                    <a:bodyPr/>
+                    <a:lstStyle/>
+                    <a:p>
+                      <a:pPr algn="l"/>
+                      <a:r>
+                        <a:rPr sz="900" b="1" i="0">
+                          <a:solidFill>
+                            <a:srgbClr val="1A56DB"/>
+                          </a:solidFill>
+                          <a:latin typeface="Consolas"/>
+                        </a:rPr>
+                        <a:t>permanent-gotchas/fastapi/pyproject.toml</a:t>
+                      </a:r>
+                    </a:p>
+                  </a:txBody>
+                  <a:tcPr anchor="ctr" marL="73152" marR="73152" marT="18288" marB="18288">
+                    <a:solidFill>
+                      <a:srgbClr val="FAFBFC"/>
+                    </a:solidFill>
+                  </a:tcPr>
+                </a:tc>
+                <a:tc>
+                  <a:txBody>
+                    <a:bodyPr/>
+                    <a:lstStyle/>
+                    <a:p>
+                      <a:pPr algn="l"/>
+                      <a:r>
+                        <a:rPr sz="900" b="0" i="0">
                           <a:solidFill>
                             <a:srgbClr val="1F2937"/>
                           </a:solidFill>
@@ -6055,7 +6199,7 @@
                   </a:txBody>
                   <a:tcPr anchor="ctr" marL="73152" marR="73152" marT="18288" marB="18288">
                     <a:solidFill>
-                      <a:srgbClr val="EBF2FF"/>
+                      <a:srgbClr val="FAFBFC"/>
                     </a:solidFill>
                   </a:tcPr>
                 </a:tc>
@@ -6712,7 +6856,7 @@
                 </a:solidFill>
                 <a:latin typeface="Calibri"/>
               </a:rPr>
-              <a:t>web-modernize v0.13.0   ·   github.com/balaji-hari/web-mordernize</a:t>
+              <a:t>web-modernize v0.15.0   ·   github.com/balaji-hari/web-mordernize</a:t>
             </a:r>
           </a:p>
         </p:txBody>
@@ -7011,7 +7155,7 @@
                 </a:solidFill>
                 <a:latin typeface="Calibri"/>
               </a:rPr>
-              <a:t>web-modernize v0.13.0   ·   Balaji Harikrishnan   ·   Cognizant   ·   June 2026</a:t>
+              <a:t>web-modernize v0.15.0   ·   Balaji Harikrishnan   ·   Cognizant   ·   June 2026</a:t>
             </a:r>
           </a:p>
         </p:txBody>
@@ -7842,7 +7986,7 @@
                 </a:solidFill>
                 <a:latin typeface="Calibri"/>
               </a:rPr>
-              <a:t>17 skills exposed as slash commands  ·  5 AI agents (analyzer, migrator, parity-reviewer, migration-critic, gotchas catalog)  ·  2 automation hooks  ·  a workflows/ orchestration script  ·  9 schema-validated templates copied into the team's repo.</a:t>
+              <a:t>18 skills exposed as slash commands  ·  6 AI agents (analyzer, migrator, cross-cutting-migrator, parity-reviewer, migration-critic, gotchas catalog)  ·  2 automation hooks  ·  two workflows/ orchestration scripts  ·  9 schema-validated templates copied into the team's repo.</a:t>
             </a:r>
           </a:p>
         </p:txBody>
@@ -8540,7 +8684,7 @@
                 </a:solidFill>
                 <a:latin typeface="Calibri"/>
               </a:rPr>
-              <a:t>web-modernize v0.13.0   ·   Balaji Harikrishnan   ·   Cognizant   ·   June 2026</a:t>
+              <a:t>web-modernize v0.15.0   ·   Balaji Harikrishnan   ·   Cognizant   ·   June 2026</a:t>
             </a:r>
           </a:p>
         </p:txBody>
@@ -9913,7 +10057,7 @@
                 </a:solidFill>
                 <a:latin typeface="Calibri"/>
               </a:rPr>
-              <a:t>web-modernize v0.13.0   ·   Balaji Harikrishnan   ·   Cognizant   ·   June 2026</a:t>
+              <a:t>web-modernize v0.15.0   ·   Balaji Harikrishnan   ·   Cognizant   ·   June 2026</a:t>
             </a:r>
           </a:p>
         </p:txBody>
@@ -12175,7 +12319,7 @@
                 </a:solidFill>
                 <a:latin typeface="Calibri"/>
               </a:rPr>
-              <a:t>Set up once with  /scaffold  and  /auth.  Then the team migrates in parallel with  /next  and  /migrate.</a:t>
+              <a:t>Set up once with  /scaffold  and  /foundation.  Then the team migrates in parallel with  /next  and  /migrate.</a:t>
             </a:r>
           </a:p>
         </p:txBody>
@@ -12254,7 +12398,7 @@
                 </a:solidFill>
                 <a:latin typeface="Calibri"/>
               </a:rPr>
-              <a:t>web-modernize v0.13.0   ·   Balaji Harikrishnan   ·   Cognizant   ·   June 2026</a:t>
+              <a:t>web-modernize v0.15.0   ·   Balaji Harikrishnan   ·   Cognizant   ·   June 2026</a:t>
             </a:r>
           </a:p>
         </p:txBody>
@@ -12368,7 +12512,7 @@
                 </a:solidFill>
                 <a:latin typeface="Segoe UI Semibold"/>
               </a:rPr>
-              <a:t>SETUP   —   one developer runs   /scaffold   then   /auth</a:t>
+              <a:t>SETUP   —   one developer runs   /scaffold   then   /foundation</a:t>
             </a:r>
           </a:p>
         </p:txBody>
@@ -12677,7 +12821,7 @@
                 </a:solidFill>
                 <a:latin typeface="Calibri"/>
               </a:rPr>
-              <a:t>Auth Working</a:t>
+              <a:t>Foundation Ready</a:t>
             </a:r>
           </a:p>
         </p:txBody>
@@ -12712,8 +12856,8 @@
                 </a:solidFill>
                 <a:latin typeface="Calibri"/>
               </a:rPr>
-              <a:t>Login migrated first.
-Every feature depends on it.</a:t>
+              <a:t>Auth + cross-cutting slice
+migrated first.</a:t>
             </a:r>
           </a:p>
         </p:txBody>
@@ -12871,7 +13015,7 @@
                 </a:solidFill>
                 <a:latin typeface="Consolas"/>
               </a:rPr>
-              <a:t>/auth</a:t>
+              <a:t>/foundation</a:t>
             </a:r>
           </a:p>
         </p:txBody>
@@ -14743,7 +14887,7 @@
                 </a:solidFill>
                 <a:latin typeface="Calibri"/>
               </a:rPr>
-              <a:t>web-modernize v0.13.0   ·   Balaji Harikrishnan   ·   Cognizant   ·   June 2026</a:t>
+              <a:t>web-modernize v0.15.0   ·   Balaji Harikrishnan   ·   Cognizant   ·   June 2026</a:t>
             </a:r>
           </a:p>
         </p:txBody>
@@ -17305,7 +17449,7 @@
                 </a:solidFill>
                 <a:latin typeface="Calibri"/>
               </a:rPr>
-              <a:t>web-modernize v0.13.0   ·   Balaji Harikrishnan   ·   Cognizant   ·   June 2026</a:t>
+              <a:t>web-modernize v0.15.0   ·   Balaji Harikrishnan   ·   Cognizant   ·   June 2026</a:t>
             </a:r>
           </a:p>
         </p:txBody>
@@ -18233,7 +18377,7 @@
                 </a:solidFill>
                 <a:latin typeface="Calibri"/>
               </a:rPr>
-              <a:t>web-modernize v0.13.0   ·   Balaji Harikrishnan   ·   Cognizant   ·   June 2026</a:t>
+              <a:t>web-modernize v0.15.0   ·   Balaji Harikrishnan   ·   Cognizant   ·   June 2026</a:t>
             </a:r>
           </a:p>
         </p:txBody>
@@ -18428,7 +18572,7 @@
                 </a:solidFill>
                 <a:latin typeface="Calibri"/>
               </a:rPr>
-              <a:t>Every skill's description now packs intent phrases + a lifecycle anchor. Claude's native skill matcher routes plain-English requests to the right command — developers stop memorising 17 slash commands.</a:t>
+              <a:t>Every skill's description now packs intent phrases + a lifecycle anchor. Claude's native skill matcher routes plain-English requests to the right command — developers stop memorising 18 slash commands.</a:t>
             </a:r>
           </a:p>
         </p:txBody>
@@ -19694,7 +19838,7 @@
                 </a:solidFill>
                 <a:latin typeface="Calibri"/>
               </a:rPr>
-              <a:t>31 frameworks/&lt;name&gt;.md files — one per supported stack — hold the recipes /scaffold, /auth, and legacy-analyzer all read on demand. Adding a new framework is a one-file drop-in.</a:t>
+              <a:t>31 frameworks/&lt;name&gt;.md files — one per supported stack — hold the recipes /scaffold, /foundation, and legacy-analyzer all read on demand. Adding a new framework is a one-file drop-in.</a:t>
             </a:r>
           </a:p>
         </p:txBody>
@@ -20893,7 +21037,7 @@
                 </a:solidFill>
                 <a:latin typeface="Calibri"/>
               </a:rPr>
-              <a:t>/auth skips the prebuilt password-hashing template, defers to permanent-gotchas + OWASP guidance. Auth migration completes; the team supplies code.</a:t>
+              <a:t>/foundation skips the prebuilt password-hashing template, defers to permanent-gotchas + OWASP guidance. Auth migration completes; the team supplies code.</a:t>
             </a:r>
           </a:p>
         </p:txBody>
@@ -21271,7 +21415,7 @@
                 </a:solidFill>
                 <a:latin typeface="Calibri"/>
               </a:rPr>
-              <a:t>web-modernize v0.13.0   ·   Balaji Harikrishnan   ·   Cognizant   ·   June 2026</a:t>
+              <a:t>web-modernize v0.15.0   ·   Balaji Harikrishnan   ·   Cognizant   ·   June 2026</a:t>
             </a:r>
           </a:p>
         </p:txBody>

--- a/docs/decks/web-modernize-presentation.pptx
+++ b/docs/decks/web-modernize-presentation.pptx
@@ -17804,7 +17804,7 @@
                 </a:solidFill>
                 <a:latin typeface="Calibri"/>
               </a:rPr>
-              <a:t>/verify is a hard gate — lint, type-check, and tests must pass before a unit transitions from migrated to verified. A read-only parity-reviewer then compares migrated vs legacy — validation, output shape, errors, UI states, and security (dropped authorization, injection, secret leakage); high-severity differences block until acknowledged via /parity-check. An advisory migration-critic flags non-idiomatic code, and discovered credentials are masked in every shared artifact. /retry --with-prompt re-attempts with human guidance.</a:t>
+              <a:t>/verify is a hard gate — lint, type-check, and tests must pass before a unit transitions from migrated to verified. A read-only parity-reviewer then compares migrated vs legacy — validation, output shape, errors, UI states, and security (dropped authorization, injection, secret leakage); high-severity differences block until acknowledged via /parity-check. An advisory migration-critic flags non-idiomatic code and static-performance regressions (N+1 queries, unbounded fetches, bundle bloat), and an opt-in dynamic tier (API replay + Playwright E2E) adds runtime checks. Discovered credentials are masked in every shared artifact. /retry --with-prompt re-attempts with human guidance.</a:t>
             </a:r>
           </a:p>
         </p:txBody>

--- a/docs/decks/web-modernize-presentation.pptx
+++ b/docs/decks/web-modernize-presentation.pptx
@@ -17609,7 +17609,7 @@
                 </a:solidFill>
                 <a:latin typeface="Calibri"/>
               </a:rPr>
-              <a:t>Nothing is one-way</a:t>
+              <a:t>Approved going in, reversible coming out</a:t>
             </a:r>
           </a:p>
         </p:txBody>
@@ -17644,7 +17644,7 @@
                 </a:solidFill>
                 <a:latin typeface="Calibri"/>
               </a:rPr>
-              <a:t>Every action is recorded in git — the team can see who did what, when, with what input. One command  (/rollback --unit &lt;id&gt;)  reverts a single unit cleanly. Destructive commands  (/abandon --hard)  require a two-step confirmation; no accidental wipes. Per-unit notes capture the why alongside the what.</a:t>
+              <a:t>Nothing risky is written blind: by default /next presents each unit's plan — target files, approach, tests — and waits for your approval before writing a line (opt out per migration via review_mode, or per unit via --no-plan); /foundation always gates the auth + cross-cutting design. And nothing is one-way: every action is recorded in git, one command  (/rollback --unit &lt;id&gt;)  reverts a unit cleanly (refusing shared files unless forced), and destructive commands  (/abandon --hard)  need a two-step confirm. Per-unit notes capture the why alongside the what.</a:t>
             </a:r>
           </a:p>
         </p:txBody>

--- a/docs/decks/web-modernize-presentation.pptx
+++ b/docs/decks/web-modernize-presentation.pptx
@@ -3455,7 +3455,7 @@
                 </a:solidFill>
                 <a:latin typeface="Segoe UI Semibold"/>
               </a:rPr>
-              <a:t>Balaji Harikrishnan   ·   Cognizant   ·   July 2026   ·   v0.16.0</a:t>
+              <a:t>Balaji Harikrishnan   ·   Cognizant   ·   July 2026   ·   v0.18.0</a:t>
             </a:r>
           </a:p>
         </p:txBody>
@@ -3754,7 +3754,7 @@
                 </a:solidFill>
                 <a:latin typeface="Calibri"/>
               </a:rPr>
-              <a:t>web-modernize v0.16.0   ·   Balaji Harikrishnan   ·   Cognizant   ·   July 2026</a:t>
+              <a:t>web-modernize v0.18.0   ·   Balaji Harikrishnan   ·   Cognizant   ·   July 2026</a:t>
             </a:r>
           </a:p>
         </p:txBody>
@@ -5899,7 +5899,7 @@
                 </a:solidFill>
                 <a:latin typeface="Segoe UI Semibold"/>
               </a:rPr>
-              <a:t>The 18 Skills  (Slash Commands)</a:t>
+              <a:t>The 19 Skills  (Slash Commands)</a:t>
             </a:r>
           </a:p>
         </p:txBody>
@@ -6013,7 +6013,7 @@
                 </a:solidFill>
                 <a:latin typeface="Calibri"/>
               </a:rPr>
-              <a:t>web-modernize v0.16.0   ·   Balaji Harikrishnan   ·   Cognizant   ·   July 2026</a:t>
+              <a:t>web-modernize v0.18.0   ·   Balaji Harikrishnan   ·   Cognizant   ·   July 2026</a:t>
             </a:r>
           </a:p>
         </p:txBody>
@@ -6063,7 +6063,7 @@
         </p:nvGraphicFramePr>
         <p:xfrm>
           <a:off x="365760" y="1152144"/>
-          <a:ext cx="11460174" cy="5298948"/>
+          <a:ext cx="11460174" cy="5303520"/>
         </p:xfrm>
         <a:graphic>
           <a:graphicData uri="http://schemas.openxmlformats.org/drawingml/2006/table">
@@ -6075,7 +6075,7 @@
                 <a:gridCol w="2062831"/>
                 <a:gridCol w="9397343"/>
               </a:tblGrid>
-              <a:tr h="278892">
+              <a:tr h="265176">
                 <a:tc>
                   <a:txBody>
                     <a:bodyPr/>
@@ -6123,7 +6123,7 @@
                   </a:tcPr>
                 </a:tc>
               </a:tr>
-              <a:tr h="278892">
+              <a:tr h="265176">
                 <a:tc>
                   <a:txBody>
                     <a:bodyPr/>
@@ -6171,7 +6171,7 @@
                   </a:tcPr>
                 </a:tc>
               </a:tr>
-              <a:tr h="278892">
+              <a:tr h="265176">
                 <a:tc>
                   <a:txBody>
                     <a:bodyPr/>
@@ -6219,7 +6219,7 @@
                   </a:tcPr>
                 </a:tc>
               </a:tr>
-              <a:tr h="278892">
+              <a:tr h="265176">
                 <a:tc>
                   <a:txBody>
                     <a:bodyPr/>
@@ -6267,7 +6267,7 @@
                   </a:tcPr>
                 </a:tc>
               </a:tr>
-              <a:tr h="278892">
+              <a:tr h="265176">
                 <a:tc>
                   <a:txBody>
                     <a:bodyPr/>
@@ -6315,7 +6315,7 @@
                   </a:tcPr>
                 </a:tc>
               </a:tr>
-              <a:tr h="278892">
+              <a:tr h="265176">
                 <a:tc>
                   <a:txBody>
                     <a:bodyPr/>
@@ -6363,7 +6363,7 @@
                   </a:tcPr>
                 </a:tc>
               </a:tr>
-              <a:tr h="278892">
+              <a:tr h="265176">
                 <a:tc>
                   <a:txBody>
                     <a:bodyPr/>
@@ -6411,7 +6411,7 @@
                   </a:tcPr>
                 </a:tc>
               </a:tr>
-              <a:tr h="278892">
+              <a:tr h="265176">
                 <a:tc>
                   <a:txBody>
                     <a:bodyPr/>
@@ -6425,7 +6425,7 @@
                           </a:solidFill>
                           <a:latin typeface="Consolas"/>
                         </a:rPr>
-                        <a:t>/migrate</a:t>
+                        <a:t>/next-batch</a:t>
                       </a:r>
                     </a:p>
                   </a:txBody>
@@ -6448,7 +6448,7 @@
                           </a:solidFill>
                           <a:latin typeface="Calibri"/>
                         </a:rPr>
-                        <a:t>Migrates a specific unit by name — used when standup assigns work.</a:t>
+                        <a:t>Migrates several independent units in parallel in one pass — faster throughput than /next, but always skips the per-unit plan gate.</a:t>
                       </a:r>
                     </a:p>
                   </a:txBody>
@@ -6459,7 +6459,7 @@
                   </a:tcPr>
                 </a:tc>
               </a:tr>
-              <a:tr h="278892">
+              <a:tr h="265176">
                 <a:tc>
                   <a:txBody>
                     <a:bodyPr/>
@@ -6473,7 +6473,7 @@
                           </a:solidFill>
                           <a:latin typeface="Consolas"/>
                         </a:rPr>
-                        <a:t>/verify</a:t>
+                        <a:t>/migrate</a:t>
                       </a:r>
                     </a:p>
                   </a:txBody>
@@ -6496,7 +6496,7 @@
                           </a:solidFill>
                           <a:latin typeface="Calibri"/>
                         </a:rPr>
-                        <a:t>Runs lint, type-check, tests, a behavioural-parity + security gate, and advisory code-quality + static-performance review; an opt-in dynamic tier (API replay + Playwright E2E) adds runtime checks.</a:t>
+                        <a:t>Migrates a specific unit by name — used when standup assigns work.</a:t>
                       </a:r>
                     </a:p>
                   </a:txBody>
@@ -6507,7 +6507,7 @@
                   </a:tcPr>
                 </a:tc>
               </a:tr>
-              <a:tr h="278892">
+              <a:tr h="265176">
                 <a:tc>
                   <a:txBody>
                     <a:bodyPr/>
@@ -6521,7 +6521,7 @@
                           </a:solidFill>
                           <a:latin typeface="Consolas"/>
                         </a:rPr>
-                        <a:t>/parity-check</a:t>
+                        <a:t>/verify</a:t>
                       </a:r>
                     </a:p>
                   </a:txBody>
@@ -6544,7 +6544,7 @@
                           </a:solidFill>
                           <a:latin typeface="Calibri"/>
                         </a:rPr>
-                        <a:t>Compares a migrated unit's behaviour against the legacy original — validation, output shape, errors, UI states, security — and lets the team acknowledge intentional differences.</a:t>
+                        <a:t>Runs lint, type-check, tests, a behavioural-parity + security gate, and advisory code-quality + static-performance review; an opt-in dynamic tier (API replay + Playwright E2E) adds runtime checks.</a:t>
                       </a:r>
                     </a:p>
                   </a:txBody>
@@ -6555,7 +6555,7 @@
                   </a:tcPr>
                 </a:tc>
               </a:tr>
-              <a:tr h="278892">
+              <a:tr h="265176">
                 <a:tc>
                   <a:txBody>
                     <a:bodyPr/>
@@ -6569,7 +6569,7 @@
                           </a:solidFill>
                           <a:latin typeface="Consolas"/>
                         </a:rPr>
-                        <a:t>/quality-check</a:t>
+                        <a:t>/parity-check</a:t>
                       </a:r>
                     </a:p>
                   </a:txBody>
@@ -6592,7 +6592,7 @@
                           </a:solidFill>
                           <a:latin typeface="Calibri"/>
                         </a:rPr>
-                        <a:t>Advisory review of the migrated code's idiomaticity and static performance — flags legacy patterns and N+1/bundle/blocking regressions. Never blocks.</a:t>
+                        <a:t>Compares a migrated unit's behaviour against the legacy original — validation, output shape, errors, UI states, security — and lets the team acknowledge intentional differences.</a:t>
                       </a:r>
                     </a:p>
                   </a:txBody>
@@ -6603,7 +6603,7 @@
                   </a:tcPr>
                 </a:tc>
               </a:tr>
-              <a:tr h="278892">
+              <a:tr h="265176">
                 <a:tc>
                   <a:txBody>
                     <a:bodyPr/>
@@ -6617,7 +6617,7 @@
                           </a:solidFill>
                           <a:latin typeface="Consolas"/>
                         </a:rPr>
-                        <a:t>/integrate</a:t>
+                        <a:t>/quality-check</a:t>
                       </a:r>
                     </a:p>
                   </a:txBody>
@@ -6640,7 +6640,7 @@
                           </a:solidFill>
                           <a:latin typeface="Calibri"/>
                         </a:rPr>
-                        <a:t>Assembles the migrated units into the composed app — central router + nav, whole-app smoke, orphaned-unit + cutover-coverage report, and the strangler traffic-split proxy. Runs any time; idempotent.</a:t>
+                        <a:t>Advisory review of the migrated code's idiomaticity and static performance — flags legacy patterns and N+1/bundle/blocking regressions. Never blocks.</a:t>
                       </a:r>
                     </a:p>
                   </a:txBody>
@@ -6651,7 +6651,7 @@
                   </a:tcPr>
                 </a:tc>
               </a:tr>
-              <a:tr h="278892">
+              <a:tr h="265176">
                 <a:tc>
                   <a:txBody>
                     <a:bodyPr/>
@@ -6665,7 +6665,7 @@
                           </a:solidFill>
                           <a:latin typeface="Consolas"/>
                         </a:rPr>
-                        <a:t>/retry</a:t>
+                        <a:t>/integrate</a:t>
                       </a:r>
                     </a:p>
                   </a:txBody>
@@ -6688,7 +6688,7 @@
                           </a:solidFill>
                           <a:latin typeface="Calibri"/>
                         </a:rPr>
-                        <a:t>Re-attempts a failed unit, optionally with team-supplied corrective guidance.</a:t>
+                        <a:t>Assembles the migrated units into the composed app — central router + nav, whole-app smoke, orphaned-unit + cutover-coverage report, and the strangler traffic-split proxy. Runs any time; idempotent.</a:t>
                       </a:r>
                     </a:p>
                   </a:txBody>
@@ -6699,7 +6699,7 @@
                   </a:tcPr>
                 </a:tc>
               </a:tr>
-              <a:tr h="278892">
+              <a:tr h="265176">
                 <a:tc>
                   <a:txBody>
                     <a:bodyPr/>
@@ -6713,7 +6713,7 @@
                           </a:solidFill>
                           <a:latin typeface="Consolas"/>
                         </a:rPr>
-                        <a:t>/rollback</a:t>
+                        <a:t>/retry</a:t>
                       </a:r>
                     </a:p>
                   </a:txBody>
@@ -6736,7 +6736,7 @@
                           </a:solidFill>
                           <a:latin typeface="Calibri"/>
                         </a:rPr>
-                        <a:t>Reverts a single unit back to its original state in one git command — refusing by default when it owns shared files others depend on.</a:t>
+                        <a:t>Re-attempts a failed unit, optionally with team-supplied corrective guidance.</a:t>
                       </a:r>
                     </a:p>
                   </a:txBody>
@@ -6747,7 +6747,7 @@
                   </a:tcPr>
                 </a:tc>
               </a:tr>
-              <a:tr h="278892">
+              <a:tr h="265176">
                 <a:tc>
                   <a:txBody>
                     <a:bodyPr/>
@@ -6761,7 +6761,7 @@
                           </a:solidFill>
                           <a:latin typeface="Consolas"/>
                         </a:rPr>
-                        <a:t>/sync</a:t>
+                        <a:t>/rollback</a:t>
                       </a:r>
                     </a:p>
                   </a:txBody>
@@ -6784,7 +6784,7 @@
                           </a:solidFill>
                           <a:latin typeface="Calibri"/>
                         </a:rPr>
-                        <a:t>Merges teammates' parallel progress into the local copy with deterministic rules.</a:t>
+                        <a:t>Reverts a single unit back to its original state in one git command — refusing by default when it owns shared files others depend on.</a:t>
                       </a:r>
                     </a:p>
                   </a:txBody>
@@ -6795,7 +6795,7 @@
                   </a:tcPr>
                 </a:tc>
               </a:tr>
-              <a:tr h="278892">
+              <a:tr h="265176">
                 <a:tc>
                   <a:txBody>
                     <a:bodyPr/>
@@ -6809,7 +6809,7 @@
                           </a:solidFill>
                           <a:latin typeface="Consolas"/>
                         </a:rPr>
-                        <a:t>/report</a:t>
+                        <a:t>/sync</a:t>
                       </a:r>
                     </a:p>
                   </a:txBody>
@@ -6832,7 +6832,7 @@
                           </a:solidFill>
                           <a:latin typeface="Calibri"/>
                         </a:rPr>
-                        <a:t>Generates a stakeholder report — burndown, ETA, risk — in Markdown, JSON, or HTML.</a:t>
+                        <a:t>Merges teammates' parallel progress into the local copy with deterministic rules.</a:t>
                       </a:r>
                     </a:p>
                   </a:txBody>
@@ -6843,7 +6843,7 @@
                   </a:tcPr>
                 </a:tc>
               </a:tr>
-              <a:tr h="278892">
+              <a:tr h="265176">
                 <a:tc>
                   <a:txBody>
                     <a:bodyPr/>
@@ -6857,7 +6857,7 @@
                           </a:solidFill>
                           <a:latin typeface="Consolas"/>
                         </a:rPr>
-                        <a:t>/status</a:t>
+                        <a:t>/report</a:t>
                       </a:r>
                     </a:p>
                   </a:txBody>
@@ -6880,7 +6880,7 @@
                           </a:solidFill>
                           <a:latin typeface="Calibri"/>
                         </a:rPr>
-                        <a:t>Shows a real-time dashboard of every unit, owner, and blocker (read-only).</a:t>
+                        <a:t>Generates a stakeholder report — burndown, ETA, risk — in Markdown, JSON, or HTML.</a:t>
                       </a:r>
                     </a:p>
                   </a:txBody>
@@ -6891,7 +6891,7 @@
                   </a:tcPr>
                 </a:tc>
               </a:tr>
-              <a:tr h="278892">
+              <a:tr h="265176">
                 <a:tc>
                   <a:txBody>
                     <a:bodyPr/>
@@ -6905,7 +6905,7 @@
                           </a:solidFill>
                           <a:latin typeface="Consolas"/>
                         </a:rPr>
-                        <a:t>/unlock</a:t>
+                        <a:t>/status</a:t>
                       </a:r>
                     </a:p>
                   </a:txBody>
@@ -6928,7 +6928,7 @@
                           </a:solidFill>
                           <a:latin typeface="Calibri"/>
                         </a:rPr>
-                        <a:t>Force-clears a stuck advisory lock left behind by a crashed session.</a:t>
+                        <a:t>Shows a real-time dashboard of every unit, owner, and blocker (read-only).</a:t>
                       </a:r>
                     </a:p>
                   </a:txBody>
@@ -6939,7 +6939,7 @@
                   </a:tcPr>
                 </a:tc>
               </a:tr>
-              <a:tr h="278892">
+              <a:tr h="265176">
                 <a:tc>
                   <a:txBody>
                     <a:bodyPr/>
@@ -6953,7 +6953,7 @@
                           </a:solidFill>
                           <a:latin typeface="Consolas"/>
                         </a:rPr>
-                        <a:t>/abandon</a:t>
+                        <a:t>/unlock</a:t>
                       </a:r>
                     </a:p>
                   </a:txBody>
@@ -6976,13 +6976,61 @@
                           </a:solidFill>
                           <a:latin typeface="Calibri"/>
                         </a:rPr>
+                        <a:t>Force-clears a stuck advisory lock left behind by a crashed session.</a:t>
+                      </a:r>
+                    </a:p>
+                  </a:txBody>
+                  <a:tcPr anchor="ctr" marL="73152" marR="73152" marT="18288" marB="18288">
+                    <a:solidFill>
+                      <a:srgbClr val="EBF2FF"/>
+                    </a:solidFill>
+                  </a:tcPr>
+                </a:tc>
+              </a:tr>
+              <a:tr h="265176">
+                <a:tc>
+                  <a:txBody>
+                    <a:bodyPr/>
+                    <a:lstStyle/>
+                    <a:p>
+                      <a:pPr algn="l"/>
+                      <a:r>
+                        <a:rPr sz="1000" b="1" i="0">
+                          <a:solidFill>
+                            <a:srgbClr val="1A56DB"/>
+                          </a:solidFill>
+                          <a:latin typeface="Consolas"/>
+                        </a:rPr>
+                        <a:t>/abandon</a:t>
+                      </a:r>
+                    </a:p>
+                  </a:txBody>
+                  <a:tcPr anchor="ctr" marL="73152" marR="73152" marT="18288" marB="18288">
+                    <a:solidFill>
+                      <a:srgbClr val="FAFBFC"/>
+                    </a:solidFill>
+                  </a:tcPr>
+                </a:tc>
+                <a:tc>
+                  <a:txBody>
+                    <a:bodyPr/>
+                    <a:lstStyle/>
+                    <a:p>
+                      <a:pPr algn="l"/>
+                      <a:r>
+                        <a:rPr sz="1000" b="0" i="0">
+                          <a:solidFill>
+                            <a:srgbClr val="1F2937"/>
+                          </a:solidFill>
+                          <a:latin typeface="Calibri"/>
+                        </a:rPr>
                         <a:t>Formally drops a unit or resets the workspace — requires two-step confirmation.</a:t>
                       </a:r>
                     </a:p>
                   </a:txBody>
                   <a:tcPr anchor="ctr" marL="73152" marR="73152" marT="18288" marB="18288">
                     <a:solidFill>
-                      <a:srgbClr val="EBF2FF"/>
+                      <a:srgbClr val="FAFBFC"/>
                     </a:solidFill>
                   </a:tcPr>
                 </a:tc>
@@ -7285,7 +7333,7 @@
                 </a:solidFill>
                 <a:latin typeface="Calibri"/>
               </a:rPr>
-              <a:t>web-modernize v0.16.0   ·   Balaji Harikrishnan   ·   Cognizant   ·   July 2026</a:t>
+              <a:t>web-modernize v0.18.0   ·   Balaji Harikrishnan   ·   Cognizant   ·   July 2026</a:t>
             </a:r>
           </a:p>
         </p:txBody>
@@ -7355,7 +7403,7 @@
                 </a:solidFill>
                 <a:latin typeface="Segoe UI Semibold"/>
               </a:rPr>
-              <a:t>6 AI Agents   (specialised AIs that read your code, translate it, verify behaviour, quality &amp; performance, and steer around known pitfalls)</a:t>
+              <a:t>5 AI Agents   (specialised AIs that read your code, translate it, verify behaviour, quality &amp; performance, and steer around known pitfalls)</a:t>
             </a:r>
           </a:p>
         </p:txBody>
@@ -7370,7 +7418,7 @@
         </p:nvGraphicFramePr>
         <p:xfrm>
           <a:off x="365760" y="1371600"/>
-          <a:ext cx="11460174" cy="1376172"/>
+          <a:ext cx="11460174" cy="1179576"/>
         </p:xfrm>
         <a:graphic>
           <a:graphicData uri="http://schemas.openxmlformats.org/drawingml/2006/table">
@@ -7670,54 +7718,6 @@
                   </a:tcPr>
                 </a:tc>
               </a:tr>
-              <a:tr h="196596">
-                <a:tc>
-                  <a:txBody>
-                    <a:bodyPr/>
-                    <a:lstStyle/>
-                    <a:p>
-                      <a:pPr algn="l"/>
-                      <a:r>
-                        <a:rPr sz="1000" b="1" i="0">
-                          <a:solidFill>
-                            <a:srgbClr val="1A56DB"/>
-                          </a:solidFill>
-                          <a:latin typeface="Consolas"/>
-                        </a:rPr>
-                        <a:t>permanent-gotchas</a:t>
-                      </a:r>
-                    </a:p>
-                  </a:txBody>
-                  <a:tcPr anchor="ctr" marL="73152" marR="73152" marT="18288" marB="18288">
-                    <a:solidFill>
-                      <a:srgbClr val="EBF2FF"/>
-                    </a:solidFill>
-                  </a:tcPr>
-                </a:tc>
-                <a:tc>
-                  <a:txBody>
-                    <a:bodyPr/>
-                    <a:lstStyle/>
-                    <a:p>
-                      <a:pPr algn="l"/>
-                      <a:r>
-                        <a:rPr sz="1000" b="0" i="0">
-                          <a:solidFill>
-                            <a:srgbClr val="1F2937"/>
-                          </a:solidFill>
-                          <a:latin typeface="Calibri"/>
-                        </a:rPr>
-                        <a:t>Curated read-only catalog of bugs the AI cannot reliably discover on its own — first-run crashes and silent failures.</a:t>
-                      </a:r>
-                    </a:p>
-                  </a:txBody>
-                  <a:tcPr anchor="ctr" marL="73152" marR="73152" marT="18288" marB="18288">
-                    <a:solidFill>
-                      <a:srgbClr val="EBF2FF"/>
-                    </a:solidFill>
-                  </a:tcPr>
-                </a:tc>
-              </a:tr>
             </a:tbl>
           </a:graphicData>
         </a:graphic>
@@ -7957,7 +7957,7 @@
                 </a:solidFill>
                 <a:latin typeface="Segoe UI Semibold"/>
               </a:rPr>
-              <a:t>9 Templates  ·  31 Framework Files  ·  2 Workflow Scripts</a:t>
+              <a:t>9 Templates  ·  31 Framework Files  ·  4 Workflow Scripts</a:t>
             </a:r>
           </a:p>
         </p:txBody>
@@ -7972,7 +7972,7 @@
         </p:nvGraphicFramePr>
         <p:xfrm>
           <a:off x="365760" y="4407408"/>
-          <a:ext cx="11460174" cy="2148840"/>
+          <a:ext cx="11460174" cy="2139696"/>
         </p:xfrm>
         <a:graphic>
           <a:graphicData uri="http://schemas.openxmlformats.org/drawingml/2006/table">
@@ -7984,7 +7984,7 @@
                 <a:gridCol w="3896459"/>
                 <a:gridCol w="7563715"/>
               </a:tblGrid>
-              <a:tr h="214884">
+              <a:tr h="178308">
                 <a:tc>
                   <a:txBody>
                     <a:bodyPr/>
@@ -8032,7 +8032,7 @@
                   </a:tcPr>
                 </a:tc>
               </a:tr>
-              <a:tr h="214884">
+              <a:tr h="178308">
                 <a:tc>
                   <a:txBody>
                     <a:bodyPr/>
@@ -8080,7 +8080,7 @@
                   </a:tcPr>
                 </a:tc>
               </a:tr>
-              <a:tr h="214884">
+              <a:tr h="178308">
                 <a:tc>
                   <a:txBody>
                     <a:bodyPr/>
@@ -8128,7 +8128,7 @@
                   </a:tcPr>
                 </a:tc>
               </a:tr>
-              <a:tr h="214884">
+              <a:tr h="178308">
                 <a:tc>
                   <a:txBody>
                     <a:bodyPr/>
@@ -8176,7 +8176,7 @@
                   </a:tcPr>
                 </a:tc>
               </a:tr>
-              <a:tr h="214884">
+              <a:tr h="178308">
                 <a:tc>
                   <a:txBody>
                     <a:bodyPr/>
@@ -8224,7 +8224,7 @@
                   </a:tcPr>
                 </a:tc>
               </a:tr>
-              <a:tr h="214884">
+              <a:tr h="178308">
                 <a:tc>
                   <a:txBody>
                     <a:bodyPr/>
@@ -8272,7 +8272,103 @@
                   </a:tcPr>
                 </a:tc>
               </a:tr>
-              <a:tr h="214884">
+              <a:tr h="178308">
+                <a:tc>
+                  <a:txBody>
+                    <a:bodyPr/>
+                    <a:lstStyle/>
+                    <a:p>
+                      <a:pPr algn="l"/>
+                      <a:r>
+                        <a:rPr sz="900" b="1" i="0">
+                          <a:solidFill>
+                            <a:srgbClr val="1A56DB"/>
+                          </a:solidFill>
+                          <a:latin typeface="Consolas"/>
+                        </a:rPr>
+                        <a:t>workflows/next-batch.js</a:t>
+                      </a:r>
+                    </a:p>
+                  </a:txBody>
+                  <a:tcPr anchor="ctr" marL="73152" marR="73152" marT="18288" marB="18288">
+                    <a:solidFill>
+                      <a:srgbClr val="EBF2FF"/>
+                    </a:solidFill>
+                  </a:tcPr>
+                </a:tc>
+                <a:tc>
+                  <a:txBody>
+                    <a:bodyPr/>
+                    <a:lstStyle/>
+                    <a:p>
+                      <a:pPr algn="l"/>
+                      <a:r>
+                        <a:rPr sz="900" b="0" i="0">
+                          <a:solidFill>
+                            <a:srgbClr val="1F2937"/>
+                          </a:solidFill>
+                          <a:latin typeface="Calibri"/>
+                        </a:rPr>
+                        <a:t>Workflow-tool script — fans out unit-migrator (full mode, no plan gate) across a batch of independent units in parallel, for /next-batch.</a:t>
+                      </a:r>
+                    </a:p>
+                  </a:txBody>
+                  <a:tcPr anchor="ctr" marL="73152" marR="73152" marT="18288" marB="18288">
+                    <a:solidFill>
+                      <a:srgbClr val="EBF2FF"/>
+                    </a:solidFill>
+                  </a:tcPr>
+                </a:tc>
+              </a:tr>
+              <a:tr h="178308">
+                <a:tc>
+                  <a:txBody>
+                    <a:bodyPr/>
+                    <a:lstStyle/>
+                    <a:p>
+                      <a:pPr algn="l"/>
+                      <a:r>
+                        <a:rPr sz="900" b="1" i="0">
+                          <a:solidFill>
+                            <a:srgbClr val="1A56DB"/>
+                          </a:solidFill>
+                          <a:latin typeface="Consolas"/>
+                        </a:rPr>
+                        <a:t>workflows/verify-run.js</a:t>
+                      </a:r>
+                    </a:p>
+                  </a:txBody>
+                  <a:tcPr anchor="ctr" marL="73152" marR="73152" marT="18288" marB="18288">
+                    <a:solidFill>
+                      <a:srgbClr val="FAFBFC"/>
+                    </a:solidFill>
+                  </a:tcPr>
+                </a:tc>
+                <a:tc>
+                  <a:txBody>
+                    <a:bodyPr/>
+                    <a:lstStyle/>
+                    <a:p>
+                      <a:pPr algn="l"/>
+                      <a:r>
+                        <a:rPr sz="900" b="0" i="0">
+                          <a:solidFill>
+                            <a:srgbClr val="1F2937"/>
+                          </a:solidFill>
+                          <a:latin typeface="Calibri"/>
+                        </a:rPr>
+                        <a:t>Workflow-tool script — pipelines per-unit lint/type-check/tests, then fans out parity-reviewer + migration-critic + the dynamic tier, for /verify.</a:t>
+                      </a:r>
+                    </a:p>
+                  </a:txBody>
+                  <a:tcPr anchor="ctr" marL="73152" marR="73152" marT="18288" marB="18288">
+                    <a:solidFill>
+                      <a:srgbClr val="FAFBFC"/>
+                    </a:solidFill>
+                  </a:tcPr>
+                </a:tc>
+              </a:tr>
+              <a:tr h="178308">
                 <a:tc>
                   <a:txBody>
                     <a:bodyPr/>
@@ -8320,7 +8416,7 @@
                   </a:tcPr>
                 </a:tc>
               </a:tr>
-              <a:tr h="214884">
+              <a:tr h="178308">
                 <a:tc>
                   <a:txBody>
                     <a:bodyPr/>
@@ -8368,7 +8464,7 @@
                   </a:tcPr>
                 </a:tc>
               </a:tr>
-              <a:tr h="214884">
+              <a:tr h="178308">
                 <a:tc>
                   <a:txBody>
                     <a:bodyPr/>
@@ -8416,7 +8512,7 @@
                   </a:tcPr>
                 </a:tc>
               </a:tr>
-              <a:tr h="214884">
+              <a:tr h="178308">
                 <a:tc>
                   <a:txBody>
                     <a:bodyPr/>
@@ -9116,7 +9212,7 @@
                 </a:solidFill>
                 <a:latin typeface="Calibri"/>
               </a:rPr>
-              <a:t>web-modernize v0.16.0   ·   github.com/balaji-hari/web-mordernize</a:t>
+              <a:t>web-modernize v0.18.0   ·   github.com/balaji-hari/web-mordernize</a:t>
             </a:r>
           </a:p>
         </p:txBody>
@@ -9415,7 +9511,7 @@
                 </a:solidFill>
                 <a:latin typeface="Calibri"/>
               </a:rPr>
-              <a:t>web-modernize v0.16.0   ·   Balaji Harikrishnan   ·   Cognizant   ·   July 2026</a:t>
+              <a:t>web-modernize v0.18.0   ·   Balaji Harikrishnan   ·   Cognizant   ·   July 2026</a:t>
             </a:r>
           </a:p>
         </p:txBody>
@@ -10246,7 +10342,7 @@
                 </a:solidFill>
                 <a:latin typeface="Calibri"/>
               </a:rPr>
-              <a:t>18 skills exposed as slash commands  ·  6 AI agents (analyzer, migrator, cross-cutting-migrator, parity-reviewer, migration-critic, gotchas catalog)  ·  2 automation hooks  ·  two workflows/ orchestration scripts  ·  9 schema-validated templates copied into the team's repo.</a:t>
+              <a:t>19 skills exposed as slash commands  ·  5 AI agents (analyzer, migrator, cross-cutting-migrator, parity-reviewer, migration-critic)  ·  2 automation hooks  ·  four workflows/ orchestration scripts  ·  9 schema-validated templates copied into the team's repo.</a:t>
             </a:r>
           </a:p>
         </p:txBody>
@@ -10944,7 +11040,7 @@
                 </a:solidFill>
                 <a:latin typeface="Calibri"/>
               </a:rPr>
-              <a:t>web-modernize v0.16.0   ·   Balaji Harikrishnan   ·   Cognizant   ·   July 2026</a:t>
+              <a:t>web-modernize v0.18.0   ·   Balaji Harikrishnan   ·   Cognizant   ·   July 2026</a:t>
             </a:r>
           </a:p>
         </p:txBody>
@@ -11139,7 +11235,7 @@
                 </a:solidFill>
                 <a:latin typeface="Calibri"/>
               </a:rPr>
-              <a:t>Every skill's description now packs intent phrases + a lifecycle anchor. Claude's native skill matcher routes plain-English requests to the right command — developers stop memorising 18 slash commands.</a:t>
+              <a:t>Every skill's description now packs intent phrases + a lifecycle anchor. Claude's native skill matcher routes plain-English requests to the right command — developers stop memorising 19 slash commands.</a:t>
             </a:r>
           </a:p>
         </p:txBody>
@@ -13982,7 +14078,7 @@
                 </a:solidFill>
                 <a:latin typeface="Calibri"/>
               </a:rPr>
-              <a:t>web-modernize v0.16.0   ·   Balaji Harikrishnan   ·   Cognizant   ·   July 2026</a:t>
+              <a:t>web-modernize v0.18.0   ·   Balaji Harikrishnan   ·   Cognizant   ·   July 2026</a:t>
             </a:r>
           </a:p>
         </p:txBody>
@@ -16544,7 +16640,7 @@
                 </a:solidFill>
                 <a:latin typeface="Calibri"/>
               </a:rPr>
-              <a:t>web-modernize v0.16.0   ·   Balaji Harikrishnan   ·   Cognizant   ·   July 2026</a:t>
+              <a:t>web-modernize v0.18.0   ·   Balaji Harikrishnan   ·   Cognizant   ·   July 2026</a:t>
             </a:r>
           </a:p>
         </p:txBody>
@@ -17917,7 +18013,7 @@
                 </a:solidFill>
                 <a:latin typeface="Calibri"/>
               </a:rPr>
-              <a:t>web-modernize v0.16.0   ·   Balaji Harikrishnan   ·   Cognizant   ·   July 2026</a:t>
+              <a:t>web-modernize v0.18.0   ·   Balaji Harikrishnan   ·   Cognizant   ·   July 2026</a:t>
             </a:r>
           </a:p>
         </p:txBody>
@@ -18845,7 +18941,7 @@
                 </a:solidFill>
                 <a:latin typeface="Calibri"/>
               </a:rPr>
-              <a:t>web-modernize v0.16.0   ·   Balaji Harikrishnan   ·   Cognizant   ·   July 2026</a:t>
+              <a:t>web-modernize v0.18.0   ·   Balaji Harikrishnan   ·   Cognizant   ·   July 2026</a:t>
             </a:r>
           </a:p>
         </p:txBody>
@@ -20218,7 +20314,7 @@
                 </a:solidFill>
                 <a:latin typeface="Calibri"/>
               </a:rPr>
-              <a:t>web-modernize v0.16.0   ·   Balaji Harikrishnan   ·   Cognizant   ·   July 2026</a:t>
+              <a:t>web-modernize v0.18.0   ·   Balaji Harikrishnan   ·   Cognizant   ·   July 2026</a:t>
             </a:r>
           </a:p>
         </p:txBody>
@@ -22559,7 +22655,7 @@
                 </a:solidFill>
                 <a:latin typeface="Calibri"/>
               </a:rPr>
-              <a:t>web-modernize v0.16.0   ·   Balaji Harikrishnan   ·   Cognizant   ·   July 2026</a:t>
+              <a:t>web-modernize v0.18.0   ·   Balaji Harikrishnan   ·   Cognizant   ·   July 2026</a:t>
             </a:r>
           </a:p>
         </p:txBody>

--- a/docs/decks/web-modernize-presentation.pptx
+++ b/docs/decks/web-modernize-presentation.pptx
@@ -3455,7 +3455,7 @@
                 </a:solidFill>
                 <a:latin typeface="Segoe UI Semibold"/>
               </a:rPr>
-              <a:t>Balaji Harikrishnan   ·   Cognizant   ·   July 2026   ·   v0.18.0</a:t>
+              <a:t>Balaji Harikrishnan   ·   Cognizant   ·   July 2026   ·   v0.19.0</a:t>
             </a:r>
           </a:p>
         </p:txBody>
@@ -3754,7 +3754,7 @@
                 </a:solidFill>
                 <a:latin typeface="Calibri"/>
               </a:rPr>
-              <a:t>web-modernize v0.18.0   ·   Balaji Harikrishnan   ·   Cognizant   ·   July 2026</a:t>
+              <a:t>web-modernize v0.19.0   ·   Balaji Harikrishnan   ·   Cognizant   ·   July 2026</a:t>
             </a:r>
           </a:p>
         </p:txBody>
@@ -6013,7 +6013,7 @@
                 </a:solidFill>
                 <a:latin typeface="Calibri"/>
               </a:rPr>
-              <a:t>web-modernize v0.18.0   ·   Balaji Harikrishnan   ·   Cognizant   ·   July 2026</a:t>
+              <a:t>web-modernize v0.19.0   ·   Balaji Harikrishnan   ·   Cognizant   ·   July 2026</a:t>
             </a:r>
           </a:p>
         </p:txBody>
@@ -7333,7 +7333,7 @@
                 </a:solidFill>
                 <a:latin typeface="Calibri"/>
               </a:rPr>
-              <a:t>web-modernize v0.18.0   ·   Balaji Harikrishnan   ·   Cognizant   ·   July 2026</a:t>
+              <a:t>web-modernize v0.19.0   ·   Balaji Harikrishnan   ·   Cognizant   ·   July 2026</a:t>
             </a:r>
           </a:p>
         </p:txBody>
@@ -9212,7 +9212,7 @@
                 </a:solidFill>
                 <a:latin typeface="Calibri"/>
               </a:rPr>
-              <a:t>web-modernize v0.18.0   ·   github.com/balaji-hari/web-mordernize</a:t>
+              <a:t>web-modernize v0.19.0   ·   github.com/balaji-hari/web-mordernize</a:t>
             </a:r>
           </a:p>
         </p:txBody>
@@ -9511,7 +9511,7 @@
                 </a:solidFill>
                 <a:latin typeface="Calibri"/>
               </a:rPr>
-              <a:t>web-modernize v0.18.0   ·   Balaji Harikrishnan   ·   Cognizant   ·   July 2026</a:t>
+              <a:t>web-modernize v0.19.0   ·   Balaji Harikrishnan   ·   Cognizant   ·   July 2026</a:t>
             </a:r>
           </a:p>
         </p:txBody>
@@ -11040,7 +11040,7 @@
                 </a:solidFill>
                 <a:latin typeface="Calibri"/>
               </a:rPr>
-              <a:t>web-modernize v0.18.0   ·   Balaji Harikrishnan   ·   Cognizant   ·   July 2026</a:t>
+              <a:t>web-modernize v0.19.0   ·   Balaji Harikrishnan   ·   Cognizant   ·   July 2026</a:t>
             </a:r>
           </a:p>
         </p:txBody>
@@ -14078,7 +14078,7 @@
                 </a:solidFill>
                 <a:latin typeface="Calibri"/>
               </a:rPr>
-              <a:t>web-modernize v0.18.0   ·   Balaji Harikrishnan   ·   Cognizant   ·   July 2026</a:t>
+              <a:t>web-modernize v0.19.0   ·   Balaji Harikrishnan   ·   Cognizant   ·   July 2026</a:t>
             </a:r>
           </a:p>
         </p:txBody>
@@ -16640,7 +16640,7 @@
                 </a:solidFill>
                 <a:latin typeface="Calibri"/>
               </a:rPr>
-              <a:t>web-modernize v0.18.0   ·   Balaji Harikrishnan   ·   Cognizant   ·   July 2026</a:t>
+              <a:t>web-modernize v0.19.0   ·   Balaji Harikrishnan   ·   Cognizant   ·   July 2026</a:t>
             </a:r>
           </a:p>
         </p:txBody>
@@ -18013,7 +18013,7 @@
                 </a:solidFill>
                 <a:latin typeface="Calibri"/>
               </a:rPr>
-              <a:t>web-modernize v0.18.0   ·   Balaji Harikrishnan   ·   Cognizant   ·   July 2026</a:t>
+              <a:t>web-modernize v0.19.0   ·   Balaji Harikrishnan   ·   Cognizant   ·   July 2026</a:t>
             </a:r>
           </a:p>
         </p:txBody>
@@ -18941,7 +18941,7 @@
                 </a:solidFill>
                 <a:latin typeface="Calibri"/>
               </a:rPr>
-              <a:t>web-modernize v0.18.0   ·   Balaji Harikrishnan   ·   Cognizant   ·   July 2026</a:t>
+              <a:t>web-modernize v0.19.0   ·   Balaji Harikrishnan   ·   Cognizant   ·   July 2026</a:t>
             </a:r>
           </a:p>
         </p:txBody>
@@ -20314,7 +20314,7 @@
                 </a:solidFill>
                 <a:latin typeface="Calibri"/>
               </a:rPr>
-              <a:t>web-modernize v0.18.0   ·   Balaji Harikrishnan   ·   Cognizant   ·   July 2026</a:t>
+              <a:t>web-modernize v0.19.0   ·   Balaji Harikrishnan   ·   Cognizant   ·   July 2026</a:t>
             </a:r>
           </a:p>
         </p:txBody>
@@ -22655,7 +22655,7 @@
                 </a:solidFill>
                 <a:latin typeface="Calibri"/>
               </a:rPr>
-              <a:t>web-modernize v0.18.0   ·   Balaji Harikrishnan   ·   Cognizant   ·   July 2026</a:t>
+              <a:t>web-modernize v0.19.0   ·   Balaji Harikrishnan   ·   Cognizant   ·   July 2026</a:t>
             </a:r>
           </a:p>
         </p:txBody>
